--- a/Especializacion/Proyecto I/Clases/Sesion 11 - Integración y evaluación · coevaluación y autoevaluación/Presentacion.pptx
+++ b/Especializacion/Proyecto I/Clases/Sesion 11 - Integración y evaluación · coevaluación y autoevaluación/Presentacion.pptx
@@ -3366,41 +3366,6 @@
           </a:p>
         </p:txBody>
       </p:sp>
-      <p:sp>
-        <p:nvSpPr>
-          <p:cNvPr id="7" name="TextBox 6"/>
-          <p:cNvSpPr txBox="1"/>
-          <p:nvPr/>
-        </p:nvSpPr>
-        <p:spPr>
-          <a:xfrm>
-            <a:off x="2194560" y="6446520"/>
-            <a:ext cx="5943600" cy="274320"/>
-          </a:xfrm>
-          <a:prstGeom prst="rect">
-            <a:avLst/>
-          </a:prstGeom>
-          <a:noFill/>
-        </p:spPr>
-        <p:txBody>
-          <a:bodyPr wrap="square" anchor="t" lIns="0" rIns="0" tIns="0" bIns="0">
-            <a:spAutoFit/>
-          </a:bodyPr>
-          <a:lstStyle/>
-          <a:p>
-            <a:pPr algn="l"/>
-            <a:r>
-              <a:rPr sz="1000" b="1" i="0">
-                <a:solidFill>
-                  <a:srgbClr val="8F989D"/>
-                </a:solidFill>
-                <a:latin typeface="Calibri"/>
-              </a:rPr>
-              <a:t>Inicio 8:10 pm</a:t>
-            </a:r>
-          </a:p>
-        </p:txBody>
-      </p:sp>
     </p:spTree>
   </p:cSld>
   <p:clrMapOvr>
@@ -3886,41 +3851,6 @@
         </p:nvSpPr>
         <p:spPr>
           <a:xfrm>
-            <a:off x="2194560" y="6446520"/>
-            <a:ext cx="5943600" cy="274320"/>
-          </a:xfrm>
-          <a:prstGeom prst="rect">
-            <a:avLst/>
-          </a:prstGeom>
-          <a:noFill/>
-        </p:spPr>
-        <p:txBody>
-          <a:bodyPr wrap="square" anchor="t" lIns="0" rIns="0" tIns="0" bIns="0">
-            <a:spAutoFit/>
-          </a:bodyPr>
-          <a:lstStyle/>
-          <a:p>
-            <a:pPr algn="l"/>
-            <a:r>
-              <a:rPr sz="1000" b="1" i="0">
-                <a:solidFill>
-                  <a:srgbClr val="8F989D"/>
-                </a:solidFill>
-                <a:latin typeface="Calibri"/>
-              </a:rPr>
-              <a:t>Inicio 8:10 pm</a:t>
-            </a:r>
-          </a:p>
-        </p:txBody>
-      </p:sp>
-      <p:sp>
-        <p:nvSpPr>
-          <p:cNvPr id="11" name="TextBox 10"/>
-          <p:cNvSpPr txBox="1"/>
-          <p:nvPr/>
-        </p:nvSpPr>
-        <p:spPr>
-          <a:xfrm>
             <a:off x="11094415" y="6446520"/>
             <a:ext cx="548640" cy="274320"/>
           </a:xfrm>
@@ -4345,41 +4275,6 @@
         </p:nvSpPr>
         <p:spPr>
           <a:xfrm>
-            <a:off x="2194560" y="6446520"/>
-            <a:ext cx="5943600" cy="274320"/>
-          </a:xfrm>
-          <a:prstGeom prst="rect">
-            <a:avLst/>
-          </a:prstGeom>
-          <a:noFill/>
-        </p:spPr>
-        <p:txBody>
-          <a:bodyPr wrap="square" anchor="t" lIns="0" rIns="0" tIns="0" bIns="0">
-            <a:spAutoFit/>
-          </a:bodyPr>
-          <a:lstStyle/>
-          <a:p>
-            <a:pPr algn="l"/>
-            <a:r>
-              <a:rPr sz="1000" b="1" i="0">
-                <a:solidFill>
-                  <a:srgbClr val="8F989D"/>
-                </a:solidFill>
-                <a:latin typeface="Calibri"/>
-              </a:rPr>
-              <a:t>Inicio 8:10 pm</a:t>
-            </a:r>
-          </a:p>
-        </p:txBody>
-      </p:sp>
-      <p:sp>
-        <p:nvSpPr>
-          <p:cNvPr id="6" name="TextBox 5"/>
-          <p:cNvSpPr txBox="1"/>
-          <p:nvPr/>
-        </p:nvSpPr>
-        <p:spPr>
-          <a:xfrm>
             <a:off x="11094415" y="6446520"/>
             <a:ext cx="548640" cy="274320"/>
           </a:xfrm>
@@ -4813,41 +4708,6 @@
         </p:nvSpPr>
         <p:spPr>
           <a:xfrm>
-            <a:off x="2194560" y="6446520"/>
-            <a:ext cx="5943600" cy="274320"/>
-          </a:xfrm>
-          <a:prstGeom prst="rect">
-            <a:avLst/>
-          </a:prstGeom>
-          <a:noFill/>
-        </p:spPr>
-        <p:txBody>
-          <a:bodyPr wrap="square" anchor="t" lIns="0" rIns="0" tIns="0" bIns="0">
-            <a:spAutoFit/>
-          </a:bodyPr>
-          <a:lstStyle/>
-          <a:p>
-            <a:pPr algn="l"/>
-            <a:r>
-              <a:rPr sz="1000" b="1" i="0">
-                <a:solidFill>
-                  <a:srgbClr val="8F989D"/>
-                </a:solidFill>
-                <a:latin typeface="Calibri"/>
-              </a:rPr>
-              <a:t>Inicio 8:10 pm</a:t>
-            </a:r>
-          </a:p>
-        </p:txBody>
-      </p:sp>
-      <p:sp>
-        <p:nvSpPr>
-          <p:cNvPr id="6" name="TextBox 5"/>
-          <p:cNvSpPr txBox="1"/>
-          <p:nvPr/>
-        </p:nvSpPr>
-        <p:spPr>
-          <a:xfrm>
             <a:off x="11094415" y="6446520"/>
             <a:ext cx="548640" cy="274320"/>
           </a:xfrm>
@@ -5315,41 +5175,6 @@
         </p:nvSpPr>
         <p:spPr>
           <a:xfrm>
-            <a:off x="2194560" y="6446520"/>
-            <a:ext cx="5943600" cy="274320"/>
-          </a:xfrm>
-          <a:prstGeom prst="rect">
-            <a:avLst/>
-          </a:prstGeom>
-          <a:noFill/>
-        </p:spPr>
-        <p:txBody>
-          <a:bodyPr wrap="square" anchor="t" lIns="0" rIns="0" tIns="0" bIns="0">
-            <a:spAutoFit/>
-          </a:bodyPr>
-          <a:lstStyle/>
-          <a:p>
-            <a:pPr algn="l"/>
-            <a:r>
-              <a:rPr sz="1000" b="1" i="0">
-                <a:solidFill>
-                  <a:srgbClr val="8F989D"/>
-                </a:solidFill>
-                <a:latin typeface="Calibri"/>
-              </a:rPr>
-              <a:t>Inicio 8:10 pm</a:t>
-            </a:r>
-          </a:p>
-        </p:txBody>
-      </p:sp>
-      <p:sp>
-        <p:nvSpPr>
-          <p:cNvPr id="11" name="TextBox 10"/>
-          <p:cNvSpPr txBox="1"/>
-          <p:nvPr/>
-        </p:nvSpPr>
-        <p:spPr>
-          <a:xfrm>
             <a:off x="11094415" y="6446520"/>
             <a:ext cx="548640" cy="274320"/>
           </a:xfrm>
@@ -5593,41 +5418,6 @@
         </p:nvSpPr>
         <p:spPr>
           <a:xfrm>
-            <a:off x="2194560" y="6446520"/>
-            <a:ext cx="5943600" cy="274320"/>
-          </a:xfrm>
-          <a:prstGeom prst="rect">
-            <a:avLst/>
-          </a:prstGeom>
-          <a:noFill/>
-        </p:spPr>
-        <p:txBody>
-          <a:bodyPr wrap="square" anchor="t" lIns="0" rIns="0" tIns="0" bIns="0">
-            <a:spAutoFit/>
-          </a:bodyPr>
-          <a:lstStyle/>
-          <a:p>
-            <a:pPr algn="l"/>
-            <a:r>
-              <a:rPr sz="1000" b="1" i="0">
-                <a:solidFill>
-                  <a:srgbClr val="8F989D"/>
-                </a:solidFill>
-                <a:latin typeface="Calibri"/>
-              </a:rPr>
-              <a:t>Inicio 8:10 pm</a:t>
-            </a:r>
-          </a:p>
-        </p:txBody>
-      </p:sp>
-      <p:sp>
-        <p:nvSpPr>
-          <p:cNvPr id="7" name="TextBox 6"/>
-          <p:cNvSpPr txBox="1"/>
-          <p:nvPr/>
-        </p:nvSpPr>
-        <p:spPr>
-          <a:xfrm>
             <a:off x="11094415" y="6446520"/>
             <a:ext cx="548640" cy="274320"/>
           </a:xfrm>
@@ -6169,41 +5959,6 @@
         </p:nvSpPr>
         <p:spPr>
           <a:xfrm>
-            <a:off x="2194560" y="6446520"/>
-            <a:ext cx="5943600" cy="274320"/>
-          </a:xfrm>
-          <a:prstGeom prst="rect">
-            <a:avLst/>
-          </a:prstGeom>
-          <a:noFill/>
-        </p:spPr>
-        <p:txBody>
-          <a:bodyPr wrap="square" anchor="t" lIns="0" rIns="0" tIns="0" bIns="0">
-            <a:spAutoFit/>
-          </a:bodyPr>
-          <a:lstStyle/>
-          <a:p>
-            <a:pPr algn="l"/>
-            <a:r>
-              <a:rPr sz="1000" b="1" i="0">
-                <a:solidFill>
-                  <a:srgbClr val="8F989D"/>
-                </a:solidFill>
-                <a:latin typeface="Calibri"/>
-              </a:rPr>
-              <a:t>Inicio 8:10 pm</a:t>
-            </a:r>
-          </a:p>
-        </p:txBody>
-      </p:sp>
-      <p:sp>
-        <p:nvSpPr>
-          <p:cNvPr id="6" name="TextBox 5"/>
-          <p:cNvSpPr txBox="1"/>
-          <p:nvPr/>
-        </p:nvSpPr>
-        <p:spPr>
-          <a:xfrm>
             <a:off x="11094415" y="6446520"/>
             <a:ext cx="548640" cy="274320"/>
           </a:xfrm>
@@ -6565,41 +6320,6 @@
         </p:nvSpPr>
         <p:spPr>
           <a:xfrm>
-            <a:off x="2194560" y="6446520"/>
-            <a:ext cx="5943600" cy="274320"/>
-          </a:xfrm>
-          <a:prstGeom prst="rect">
-            <a:avLst/>
-          </a:prstGeom>
-          <a:noFill/>
-        </p:spPr>
-        <p:txBody>
-          <a:bodyPr wrap="square" anchor="t" lIns="0" rIns="0" tIns="0" bIns="0">
-            <a:spAutoFit/>
-          </a:bodyPr>
-          <a:lstStyle/>
-          <a:p>
-            <a:pPr algn="l"/>
-            <a:r>
-              <a:rPr sz="1000" b="1" i="0">
-                <a:solidFill>
-                  <a:srgbClr val="8F989D"/>
-                </a:solidFill>
-                <a:latin typeface="Calibri"/>
-              </a:rPr>
-              <a:t>Inicio 8:10 pm</a:t>
-            </a:r>
-          </a:p>
-        </p:txBody>
-      </p:sp>
-      <p:sp>
-        <p:nvSpPr>
-          <p:cNvPr id="6" name="TextBox 5"/>
-          <p:cNvSpPr txBox="1"/>
-          <p:nvPr/>
-        </p:nvSpPr>
-        <p:spPr>
-          <a:xfrm>
             <a:off x="11094415" y="6446520"/>
             <a:ext cx="548640" cy="274320"/>
           </a:xfrm>
@@ -7087,41 +6807,6 @@
         </p:nvSpPr>
         <p:spPr>
           <a:xfrm>
-            <a:off x="2194560" y="6446520"/>
-            <a:ext cx="5943600" cy="274320"/>
-          </a:xfrm>
-          <a:prstGeom prst="rect">
-            <a:avLst/>
-          </a:prstGeom>
-          <a:noFill/>
-        </p:spPr>
-        <p:txBody>
-          <a:bodyPr wrap="square" anchor="t" lIns="0" rIns="0" tIns="0" bIns="0">
-            <a:spAutoFit/>
-          </a:bodyPr>
-          <a:lstStyle/>
-          <a:p>
-            <a:pPr algn="l"/>
-            <a:r>
-              <a:rPr sz="1000" b="1" i="0">
-                <a:solidFill>
-                  <a:srgbClr val="8F989D"/>
-                </a:solidFill>
-                <a:latin typeface="Calibri"/>
-              </a:rPr>
-              <a:t>Inicio 8:10 pm</a:t>
-            </a:r>
-          </a:p>
-        </p:txBody>
-      </p:sp>
-      <p:sp>
-        <p:nvSpPr>
-          <p:cNvPr id="6" name="TextBox 5"/>
-          <p:cNvSpPr txBox="1"/>
-          <p:nvPr/>
-        </p:nvSpPr>
-        <p:spPr>
-          <a:xfrm>
             <a:off x="11094415" y="6446520"/>
             <a:ext cx="548640" cy="274320"/>
           </a:xfrm>
@@ -7528,41 +7213,6 @@
         </p:nvSpPr>
         <p:spPr>
           <a:xfrm>
-            <a:off x="2194560" y="6446520"/>
-            <a:ext cx="5943600" cy="274320"/>
-          </a:xfrm>
-          <a:prstGeom prst="rect">
-            <a:avLst/>
-          </a:prstGeom>
-          <a:noFill/>
-        </p:spPr>
-        <p:txBody>
-          <a:bodyPr wrap="square" anchor="t" lIns="0" rIns="0" tIns="0" bIns="0">
-            <a:spAutoFit/>
-          </a:bodyPr>
-          <a:lstStyle/>
-          <a:p>
-            <a:pPr algn="l"/>
-            <a:r>
-              <a:rPr sz="1000" b="1" i="0">
-                <a:solidFill>
-                  <a:srgbClr val="8F989D"/>
-                </a:solidFill>
-                <a:latin typeface="Calibri"/>
-              </a:rPr>
-              <a:t>Inicio 8:10 pm</a:t>
-            </a:r>
-          </a:p>
-        </p:txBody>
-      </p:sp>
-      <p:sp>
-        <p:nvSpPr>
-          <p:cNvPr id="6" name="TextBox 5"/>
-          <p:cNvSpPr txBox="1"/>
-          <p:nvPr/>
-        </p:nvSpPr>
-        <p:spPr>
-          <a:xfrm>
             <a:off x="11094415" y="6446520"/>
             <a:ext cx="548640" cy="274320"/>
           </a:xfrm>
@@ -7809,41 +7459,6 @@
           </a:p>
         </p:txBody>
       </p:sp>
-      <p:sp>
-        <p:nvSpPr>
-          <p:cNvPr id="7" name="TextBox 6"/>
-          <p:cNvSpPr txBox="1"/>
-          <p:nvPr/>
-        </p:nvSpPr>
-        <p:spPr>
-          <a:xfrm>
-            <a:off x="2194560" y="6446520"/>
-            <a:ext cx="5943600" cy="274320"/>
-          </a:xfrm>
-          <a:prstGeom prst="rect">
-            <a:avLst/>
-          </a:prstGeom>
-          <a:noFill/>
-        </p:spPr>
-        <p:txBody>
-          <a:bodyPr wrap="square" anchor="t" lIns="0" rIns="0" tIns="0" bIns="0">
-            <a:spAutoFit/>
-          </a:bodyPr>
-          <a:lstStyle/>
-          <a:p>
-            <a:pPr algn="l"/>
-            <a:r>
-              <a:rPr sz="1000" b="1" i="0">
-                <a:solidFill>
-                  <a:srgbClr val="8F989D"/>
-                </a:solidFill>
-                <a:latin typeface="Calibri"/>
-              </a:rPr>
-              <a:t>Inicio 8:10 pm</a:t>
-            </a:r>
-          </a:p>
-        </p:txBody>
-      </p:sp>
     </p:spTree>
   </p:cSld>
   <p:clrMapOvr>
@@ -8268,41 +7883,6 @@
         </p:nvSpPr>
         <p:spPr>
           <a:xfrm>
-            <a:off x="2194560" y="6446520"/>
-            <a:ext cx="5943600" cy="274320"/>
-          </a:xfrm>
-          <a:prstGeom prst="rect">
-            <a:avLst/>
-          </a:prstGeom>
-          <a:noFill/>
-        </p:spPr>
-        <p:txBody>
-          <a:bodyPr wrap="square" anchor="t" lIns="0" rIns="0" tIns="0" bIns="0">
-            <a:spAutoFit/>
-          </a:bodyPr>
-          <a:lstStyle/>
-          <a:p>
-            <a:pPr algn="l"/>
-            <a:r>
-              <a:rPr sz="1000" b="1" i="0">
-                <a:solidFill>
-                  <a:srgbClr val="8F989D"/>
-                </a:solidFill>
-                <a:latin typeface="Calibri"/>
-              </a:rPr>
-              <a:t>Inicio 8:10 pm</a:t>
-            </a:r>
-          </a:p>
-        </p:txBody>
-      </p:sp>
-      <p:sp>
-        <p:nvSpPr>
-          <p:cNvPr id="6" name="TextBox 5"/>
-          <p:cNvSpPr txBox="1"/>
-          <p:nvPr/>
-        </p:nvSpPr>
-        <p:spPr>
-          <a:xfrm>
             <a:off x="11094415" y="6446520"/>
             <a:ext cx="548640" cy="274320"/>
           </a:xfrm>
@@ -8668,41 +8248,6 @@
       <p:sp>
         <p:nvSpPr>
           <p:cNvPr id="5" name="TextBox 4"/>
-          <p:cNvSpPr txBox="1"/>
-          <p:nvPr/>
-        </p:nvSpPr>
-        <p:spPr>
-          <a:xfrm>
-            <a:off x="2194560" y="6446520"/>
-            <a:ext cx="5943600" cy="274320"/>
-          </a:xfrm>
-          <a:prstGeom prst="rect">
-            <a:avLst/>
-          </a:prstGeom>
-          <a:noFill/>
-        </p:spPr>
-        <p:txBody>
-          <a:bodyPr wrap="square" anchor="t" lIns="0" rIns="0" tIns="0" bIns="0">
-            <a:spAutoFit/>
-          </a:bodyPr>
-          <a:lstStyle/>
-          <a:p>
-            <a:pPr algn="l"/>
-            <a:r>
-              <a:rPr sz="1000" b="1" i="0">
-                <a:solidFill>
-                  <a:srgbClr val="8F989D"/>
-                </a:solidFill>
-                <a:latin typeface="Calibri"/>
-              </a:rPr>
-              <a:t>Inicio 8:10 pm</a:t>
-            </a:r>
-          </a:p>
-        </p:txBody>
-      </p:sp>
-      <p:sp>
-        <p:nvSpPr>
-          <p:cNvPr id="6" name="TextBox 5"/>
           <p:cNvSpPr txBox="1"/>
           <p:nvPr/>
         </p:nvSpPr>
@@ -9566,41 +9111,6 @@
         </p:nvSpPr>
         <p:spPr>
           <a:xfrm>
-            <a:off x="2194560" y="6446520"/>
-            <a:ext cx="5943600" cy="274320"/>
-          </a:xfrm>
-          <a:prstGeom prst="rect">
-            <a:avLst/>
-          </a:prstGeom>
-          <a:noFill/>
-        </p:spPr>
-        <p:txBody>
-          <a:bodyPr wrap="square" anchor="t" lIns="0" rIns="0" tIns="0" bIns="0">
-            <a:spAutoFit/>
-          </a:bodyPr>
-          <a:lstStyle/>
-          <a:p>
-            <a:pPr algn="l"/>
-            <a:r>
-              <a:rPr sz="1000" b="1" i="0">
-                <a:solidFill>
-                  <a:srgbClr val="8F989D"/>
-                </a:solidFill>
-                <a:latin typeface="Calibri"/>
-              </a:rPr>
-              <a:t>Inicio 8:10 pm</a:t>
-            </a:r>
-          </a:p>
-        </p:txBody>
-      </p:sp>
-      <p:sp>
-        <p:nvSpPr>
-          <p:cNvPr id="7" name="TextBox 6"/>
-          <p:cNvSpPr txBox="1"/>
-          <p:nvPr/>
-        </p:nvSpPr>
-        <p:spPr>
-          <a:xfrm>
             <a:off x="11094415" y="6446520"/>
             <a:ext cx="548640" cy="274320"/>
           </a:xfrm>
@@ -10052,41 +9562,6 @@
         </p:nvSpPr>
         <p:spPr>
           <a:xfrm>
-            <a:off x="2194560" y="6446520"/>
-            <a:ext cx="5943600" cy="274320"/>
-          </a:xfrm>
-          <a:prstGeom prst="rect">
-            <a:avLst/>
-          </a:prstGeom>
-          <a:noFill/>
-        </p:spPr>
-        <p:txBody>
-          <a:bodyPr wrap="square" anchor="t" lIns="0" rIns="0" tIns="0" bIns="0">
-            <a:spAutoFit/>
-          </a:bodyPr>
-          <a:lstStyle/>
-          <a:p>
-            <a:pPr algn="l"/>
-            <a:r>
-              <a:rPr sz="1000" b="1" i="0">
-                <a:solidFill>
-                  <a:srgbClr val="8F989D"/>
-                </a:solidFill>
-                <a:latin typeface="Calibri"/>
-              </a:rPr>
-              <a:t>Inicio 8:10 pm</a:t>
-            </a:r>
-          </a:p>
-        </p:txBody>
-      </p:sp>
-      <p:sp>
-        <p:nvSpPr>
-          <p:cNvPr id="6" name="TextBox 5"/>
-          <p:cNvSpPr txBox="1"/>
-          <p:nvPr/>
-        </p:nvSpPr>
-        <p:spPr>
-          <a:xfrm>
             <a:off x="11094415" y="6446520"/>
             <a:ext cx="548640" cy="274320"/>
           </a:xfrm>
@@ -10116,7 +9591,7 @@
       </p:sp>
       <p:sp>
         <p:nvSpPr>
-          <p:cNvPr id="7" name="TextBox 6"/>
+          <p:cNvPr id="6" name="TextBox 5"/>
           <p:cNvSpPr txBox="1"/>
           <p:nvPr/>
         </p:nvSpPr>
@@ -10603,41 +10078,6 @@
       <p:sp>
         <p:nvSpPr>
           <p:cNvPr id="5" name="TextBox 4"/>
-          <p:cNvSpPr txBox="1"/>
-          <p:nvPr/>
-        </p:nvSpPr>
-        <p:spPr>
-          <a:xfrm>
-            <a:off x="2194560" y="6446520"/>
-            <a:ext cx="5943600" cy="274320"/>
-          </a:xfrm>
-          <a:prstGeom prst="rect">
-            <a:avLst/>
-          </a:prstGeom>
-          <a:noFill/>
-        </p:spPr>
-        <p:txBody>
-          <a:bodyPr wrap="square" anchor="t" lIns="0" rIns="0" tIns="0" bIns="0">
-            <a:spAutoFit/>
-          </a:bodyPr>
-          <a:lstStyle/>
-          <a:p>
-            <a:pPr algn="l"/>
-            <a:r>
-              <a:rPr sz="1000" b="1" i="0">
-                <a:solidFill>
-                  <a:srgbClr val="8F989D"/>
-                </a:solidFill>
-                <a:latin typeface="Calibri"/>
-              </a:rPr>
-              <a:t>Inicio 8:10 pm</a:t>
-            </a:r>
-          </a:p>
-        </p:txBody>
-      </p:sp>
-      <p:sp>
-        <p:nvSpPr>
-          <p:cNvPr id="6" name="TextBox 5"/>
           <p:cNvSpPr txBox="1"/>
           <p:nvPr/>
         </p:nvSpPr>
@@ -11333,41 +10773,6 @@
         </p:nvSpPr>
         <p:spPr>
           <a:xfrm>
-            <a:off x="2194560" y="6446520"/>
-            <a:ext cx="5943600" cy="274320"/>
-          </a:xfrm>
-          <a:prstGeom prst="rect">
-            <a:avLst/>
-          </a:prstGeom>
-          <a:noFill/>
-        </p:spPr>
-        <p:txBody>
-          <a:bodyPr wrap="square" anchor="t" lIns="0" rIns="0" tIns="0" bIns="0">
-            <a:spAutoFit/>
-          </a:bodyPr>
-          <a:lstStyle/>
-          <a:p>
-            <a:pPr algn="l"/>
-            <a:r>
-              <a:rPr sz="1000" b="1" i="0">
-                <a:solidFill>
-                  <a:srgbClr val="8F989D"/>
-                </a:solidFill>
-                <a:latin typeface="Calibri"/>
-              </a:rPr>
-              <a:t>Inicio 8:10 pm</a:t>
-            </a:r>
-          </a:p>
-        </p:txBody>
-      </p:sp>
-      <p:sp>
-        <p:nvSpPr>
-          <p:cNvPr id="7" name="TextBox 6"/>
-          <p:cNvSpPr txBox="1"/>
-          <p:nvPr/>
-        </p:nvSpPr>
-        <p:spPr>
-          <a:xfrm>
             <a:off x="11094415" y="6446520"/>
             <a:ext cx="548640" cy="274320"/>
           </a:xfrm>
@@ -11814,41 +11219,6 @@
       <p:sp>
         <p:nvSpPr>
           <p:cNvPr id="5" name="TextBox 4"/>
-          <p:cNvSpPr txBox="1"/>
-          <p:nvPr/>
-        </p:nvSpPr>
-        <p:spPr>
-          <a:xfrm>
-            <a:off x="2194560" y="6446520"/>
-            <a:ext cx="5943600" cy="274320"/>
-          </a:xfrm>
-          <a:prstGeom prst="rect">
-            <a:avLst/>
-          </a:prstGeom>
-          <a:noFill/>
-        </p:spPr>
-        <p:txBody>
-          <a:bodyPr wrap="square" anchor="t" lIns="0" rIns="0" tIns="0" bIns="0">
-            <a:spAutoFit/>
-          </a:bodyPr>
-          <a:lstStyle/>
-          <a:p>
-            <a:pPr algn="l"/>
-            <a:r>
-              <a:rPr sz="1000" b="1" i="0">
-                <a:solidFill>
-                  <a:srgbClr val="8F989D"/>
-                </a:solidFill>
-                <a:latin typeface="Calibri"/>
-              </a:rPr>
-              <a:t>Inicio 8:10 pm</a:t>
-            </a:r>
-          </a:p>
-        </p:txBody>
-      </p:sp>
-      <p:sp>
-        <p:nvSpPr>
-          <p:cNvPr id="6" name="TextBox 5"/>
           <p:cNvSpPr txBox="1"/>
           <p:nvPr/>
         </p:nvSpPr>
@@ -12408,41 +11778,6 @@
         </p:nvSpPr>
         <p:spPr>
           <a:xfrm>
-            <a:off x="2194560" y="6446520"/>
-            <a:ext cx="5943600" cy="274320"/>
-          </a:xfrm>
-          <a:prstGeom prst="rect">
-            <a:avLst/>
-          </a:prstGeom>
-          <a:noFill/>
-        </p:spPr>
-        <p:txBody>
-          <a:bodyPr wrap="square" anchor="t" lIns="0" rIns="0" tIns="0" bIns="0">
-            <a:spAutoFit/>
-          </a:bodyPr>
-          <a:lstStyle/>
-          <a:p>
-            <a:pPr algn="l"/>
-            <a:r>
-              <a:rPr sz="1000" b="1" i="0">
-                <a:solidFill>
-                  <a:srgbClr val="8F989D"/>
-                </a:solidFill>
-                <a:latin typeface="Calibri"/>
-              </a:rPr>
-              <a:t>Inicio 8:10 pm</a:t>
-            </a:r>
-          </a:p>
-        </p:txBody>
-      </p:sp>
-      <p:sp>
-        <p:nvSpPr>
-          <p:cNvPr id="7" name="TextBox 6"/>
-          <p:cNvSpPr txBox="1"/>
-          <p:nvPr/>
-        </p:nvSpPr>
-        <p:spPr>
-          <a:xfrm>
             <a:off x="11094415" y="6446520"/>
             <a:ext cx="548640" cy="274320"/>
           </a:xfrm>

--- a/Especializacion/Proyecto I/Clases/Sesion 11 - Integración y evaluación · coevaluación y autoevaluación/Presentacion.pptx
+++ b/Especializacion/Proyecto I/Clases/Sesion 11 - Integración y evaluación · coevaluación y autoevaluación/Presentacion.pptx
@@ -24,6 +24,8 @@
     <p:sldId id="272" r:id="rId23"/>
     <p:sldId id="273" r:id="rId24"/>
     <p:sldId id="274" r:id="rId25"/>
+    <p:sldId id="275" r:id="rId26"/>
+    <p:sldId id="276" r:id="rId27"/>
   </p:sldIdLst>
   <p:sldSz cx="12191695" cy="6858000" type="screen4x3"/>
   <p:notesSz cx="6858000" cy="9144000"/>
@@ -3838,7 +3840,7 @@
                 </a:solidFill>
                 <a:latin typeface="Calibri"/>
               </a:rPr>
-              <a:t> y publicado en [URL CDigital — campus del curso pendiente]. Revíselo apenas termine el encuentro.</a:t>
+              <a:t> y publicado en https://cdigital.cun.edu.co/course/view.php?id=130378. Revíselo apenas termine el encuentro.</a:t>
             </a:r>
           </a:p>
         </p:txBody>
@@ -5545,7 +5547,7 @@
                 </a:solidFill>
                 <a:latin typeface="Calibri"/>
               </a:rPr>
-              <a:t>TALLER · Coevaluación entre pares y ajustes (20 minutos)</a:t>
+              <a:t>TALLER · Coevaluación entre pares y ajustes</a:t>
             </a:r>
           </a:p>
         </p:txBody>
@@ -5558,8 +5560,8 @@
         </p:nvSpPr>
         <p:spPr>
           <a:xfrm>
-            <a:off x="640080" y="1691639"/>
-            <a:ext cx="10911535" cy="4617720"/>
+            <a:off x="640080" y="1280160"/>
+            <a:ext cx="10911535" cy="411480"/>
           </a:xfrm>
           <a:prstGeom prst="rect">
             <a:avLst/>
@@ -5572,6 +5574,41 @@
           </a:bodyPr>
           <a:lstStyle/>
           <a:p>
+            <a:pPr algn="ctr"/>
+            <a:r>
+              <a:rPr sz="1500" b="0" i="0">
+                <a:solidFill>
+                  <a:srgbClr val="2B2B2B"/>
+                </a:solidFill>
+                <a:latin typeface="Calibri"/>
+              </a:rPr>
+              <a:t>En parejas de equipos, lectura cruzada · el Docente modera el intercambio</a:t>
+            </a:r>
+          </a:p>
+        </p:txBody>
+      </p:sp>
+      <p:sp>
+        <p:nvSpPr>
+          <p:cNvPr id="5" name="TextBox 4"/>
+          <p:cNvSpPr txBox="1"/>
+          <p:nvPr/>
+        </p:nvSpPr>
+        <p:spPr>
+          <a:xfrm>
+            <a:off x="640080" y="2011679"/>
+            <a:ext cx="10911535" cy="4297680"/>
+          </a:xfrm>
+          <a:prstGeom prst="rect">
+            <a:avLst/>
+          </a:prstGeom>
+          <a:noFill/>
+        </p:spPr>
+        <p:txBody>
+          <a:bodyPr wrap="square" anchor="t" lIns="0" rIns="0" tIns="0" bIns="0">
+            <a:spAutoFit/>
+          </a:bodyPr>
+          <a:lstStyle/>
+          <a:p>
             <a:pPr>
               <a:spcAft>
                 <a:spcPts val="1000"/>
@@ -5593,7 +5630,7 @@
                 </a:solidFill>
                 <a:latin typeface="Calibri"/>
               </a:rPr>
-              <a:t>Consigna literal</a:t>
+              <a:t>Al final tiene:</a:t>
             </a:r>
             <a:r>
               <a:rPr sz="1600" b="0" i="0">
@@ -5602,249 +5639,7 @@
                 </a:solidFill>
                 <a:latin typeface="Calibri"/>
               </a:rPr>
-              <a:t>, en parejas de equipos (lectura cruzada):</a:t>
-            </a:r>
-          </a:p>
-          <a:p>
-            <a:pPr lvl="1">
-              <a:spcAft>
-                <a:spcPts val="600"/>
-              </a:spcAft>
-            </a:pPr>
-            <a:r>
-              <a:rPr sz="1500" b="0" i="0">
-                <a:solidFill>
-                  <a:srgbClr val="2B2B2B"/>
-                </a:solidFill>
-                <a:latin typeface="Calibri"/>
-              </a:rPr>
-              <a:t>●   </a:t>
-            </a:r>
-            <a:r>
-              <a:rPr sz="1500" b="1" i="0">
-                <a:solidFill>
-                  <a:srgbClr val="2B2B2B"/>
-                </a:solidFill>
-                <a:latin typeface="Calibri"/>
-              </a:rPr>
-              <a:t>(a)</a:t>
-            </a:r>
-            <a:r>
-              <a:rPr sz="1500" b="0" i="0">
-                <a:solidFill>
-                  <a:srgbClr val="2B2B2B"/>
-                </a:solidFill>
-                <a:latin typeface="Calibri"/>
-              </a:rPr>
-              <a:t> Intercambien </a:t>
-            </a:r>
-            <a:r>
-              <a:rPr sz="1500" b="1" i="0">
-                <a:solidFill>
-                  <a:srgbClr val="2B2B2B"/>
-                </a:solidFill>
-                <a:latin typeface="Calibri"/>
-              </a:rPr>
-              <a:t>una sección</a:t>
-            </a:r>
-            <a:r>
-              <a:rPr sz="1500" b="0" i="0">
-                <a:solidFill>
-                  <a:srgbClr val="2B2B2B"/>
-                </a:solidFill>
-                <a:latin typeface="Calibri"/>
-              </a:rPr>
-              <a:t> del anteproyecto — de preferencia el método o el instrumento propuesto.</a:t>
-            </a:r>
-          </a:p>
-          <a:p>
-            <a:pPr lvl="1">
-              <a:spcAft>
-                <a:spcPts val="600"/>
-              </a:spcAft>
-            </a:pPr>
-            <a:r>
-              <a:rPr sz="1500" b="0" i="0">
-                <a:solidFill>
-                  <a:srgbClr val="2B2B2B"/>
-                </a:solidFill>
-                <a:latin typeface="Calibri"/>
-              </a:rPr>
-              <a:t>●   </a:t>
-            </a:r>
-            <a:r>
-              <a:rPr sz="1500" b="1" i="0">
-                <a:solidFill>
-                  <a:srgbClr val="2B2B2B"/>
-                </a:solidFill>
-                <a:latin typeface="Calibri"/>
-              </a:rPr>
-              <a:t>(b)</a:t>
-            </a:r>
-            <a:r>
-              <a:rPr sz="1500" b="0" i="0">
-                <a:solidFill>
-                  <a:srgbClr val="2B2B2B"/>
-                </a:solidFill>
-                <a:latin typeface="Calibri"/>
-              </a:rPr>
-              <a:t> Ubique la sección recibida en la </a:t>
-            </a:r>
-            <a:r>
-              <a:rPr sz="1500" b="1" i="0">
-                <a:solidFill>
-                  <a:srgbClr val="2B2B2B"/>
-                </a:solidFill>
-                <a:latin typeface="Calibri"/>
-              </a:rPr>
-              <a:t>rúbrica de cuatro criterios</a:t>
-            </a:r>
-            <a:r>
-              <a:rPr sz="1500" b="0" i="0">
-                <a:solidFill>
-                  <a:srgbClr val="2B2B2B"/>
-                </a:solidFill>
-                <a:latin typeface="Calibri"/>
-              </a:rPr>
-              <a:t> y marque un nivel por criterio.</a:t>
-            </a:r>
-          </a:p>
-          <a:p>
-            <a:pPr lvl="1">
-              <a:spcAft>
-                <a:spcPts val="600"/>
-              </a:spcAft>
-            </a:pPr>
-            <a:r>
-              <a:rPr sz="1500" b="0" i="0">
-                <a:solidFill>
-                  <a:srgbClr val="2B2B2B"/>
-                </a:solidFill>
-                <a:latin typeface="Calibri"/>
-              </a:rPr>
-              <a:t>●   </a:t>
-            </a:r>
-            <a:r>
-              <a:rPr sz="1500" b="1" i="0">
-                <a:solidFill>
-                  <a:srgbClr val="2B2B2B"/>
-                </a:solidFill>
-                <a:latin typeface="Calibri"/>
-              </a:rPr>
-              <a:t>(c)</a:t>
-            </a:r>
-            <a:r>
-              <a:rPr sz="1500" b="0" i="0">
-                <a:solidFill>
-                  <a:srgbClr val="2B2B2B"/>
-                </a:solidFill>
-                <a:latin typeface="Calibri"/>
-              </a:rPr>
-              <a:t> Escriba </a:t>
-            </a:r>
-            <a:r>
-              <a:rPr sz="1500" b="1" i="0">
-                <a:solidFill>
-                  <a:srgbClr val="2B2B2B"/>
-                </a:solidFill>
-                <a:latin typeface="Calibri"/>
-              </a:rPr>
-              <a:t>tres comentarios accionables</a:t>
-            </a:r>
-            <a:r>
-              <a:rPr sz="1500" b="0" i="0">
-                <a:solidFill>
-                  <a:srgbClr val="2B2B2B"/>
-                </a:solidFill>
-                <a:latin typeface="Calibri"/>
-              </a:rPr>
-              <a:t>, uno por criterio distinto, con la fórmula observación + ubicación + acción.</a:t>
-            </a:r>
-          </a:p>
-          <a:p>
-            <a:pPr lvl="1">
-              <a:spcAft>
-                <a:spcPts val="600"/>
-              </a:spcAft>
-            </a:pPr>
-            <a:r>
-              <a:rPr sz="1500" b="0" i="0">
-                <a:solidFill>
-                  <a:srgbClr val="2B2B2B"/>
-                </a:solidFill>
-                <a:latin typeface="Calibri"/>
-              </a:rPr>
-              <a:t>●   </a:t>
-            </a:r>
-            <a:r>
-              <a:rPr sz="1500" b="1" i="0">
-                <a:solidFill>
-                  <a:srgbClr val="2B2B2B"/>
-                </a:solidFill>
-                <a:latin typeface="Calibri"/>
-              </a:rPr>
-              <a:t>(d)</a:t>
-            </a:r>
-            <a:r>
-              <a:rPr sz="1500" b="0" i="0">
-                <a:solidFill>
-                  <a:srgbClr val="2B2B2B"/>
-                </a:solidFill>
-                <a:latin typeface="Calibri"/>
-              </a:rPr>
-              <a:t> Devuelva los comentarios al equipo autor y reciba los suyos.</a:t>
-            </a:r>
-          </a:p>
-          <a:p>
-            <a:pPr lvl="1">
-              <a:spcAft>
-                <a:spcPts val="600"/>
-              </a:spcAft>
-            </a:pPr>
-            <a:r>
-              <a:rPr sz="1500" b="0" i="0">
-                <a:solidFill>
-                  <a:srgbClr val="2B2B2B"/>
-                </a:solidFill>
-                <a:latin typeface="Calibri"/>
-              </a:rPr>
-              <a:t>●   </a:t>
-            </a:r>
-            <a:r>
-              <a:rPr sz="1500" b="1" i="0">
-                <a:solidFill>
-                  <a:srgbClr val="2B2B2B"/>
-                </a:solidFill>
-                <a:latin typeface="Calibri"/>
-              </a:rPr>
-              <a:t>(e)</a:t>
-            </a:r>
-            <a:r>
-              <a:rPr sz="1500" b="0" i="0">
-                <a:solidFill>
-                  <a:srgbClr val="2B2B2B"/>
-                </a:solidFill>
-                <a:latin typeface="Calibri"/>
-              </a:rPr>
-              <a:t> </a:t>
-            </a:r>
-            <a:r>
-              <a:rPr sz="1500" b="1" i="0">
-                <a:solidFill>
-                  <a:srgbClr val="2B2B2B"/>
-                </a:solidFill>
-                <a:latin typeface="Calibri"/>
-              </a:rPr>
-              <a:t>Aplique de inmediato</a:t>
-            </a:r>
-            <a:r>
-              <a:rPr sz="1500" b="0" i="0">
-                <a:solidFill>
-                  <a:srgbClr val="2B2B2B"/>
-                </a:solidFill>
-                <a:latin typeface="Calibri"/>
-              </a:rPr>
-              <a:t>, en su propio documento, al menos las mejoras que sean claramente pertinentes.</a:t>
+              <a:t> tres mejoras concretas ya aplicadas en su documento y los pendientes anotados.</a:t>
             </a:r>
           </a:p>
           <a:p>
@@ -5869,7 +5664,7 @@
                 </a:solidFill>
                 <a:latin typeface="Calibri"/>
               </a:rPr>
-              <a:t>Criterio de éxito verificable:</a:t>
+              <a:t>Paso 1</a:t>
             </a:r>
             <a:r>
               <a:rPr sz="1600" b="0" i="0">
@@ -5878,7 +5673,7 @@
                 </a:solidFill>
                 <a:latin typeface="Calibri"/>
               </a:rPr>
-              <a:t> al cerrar el taller, su documento tiene </a:t>
+              <a:t> · Intercambien </a:t>
             </a:r>
             <a:r>
               <a:rPr sz="1600" b="1" i="0">
@@ -5887,7 +5682,7 @@
                 </a:solidFill>
                 <a:latin typeface="Calibri"/>
               </a:rPr>
-              <a:t>tres mejoras concretas aplicadas</a:t>
+              <a:t>una sección</a:t>
             </a:r>
             <a:r>
               <a:rPr sz="1600" b="0" i="0">
@@ -5896,7 +5691,7 @@
                 </a:solidFill>
                 <a:latin typeface="Calibri"/>
               </a:rPr>
-              <a:t> y usted puede señalarlas en pantalla.</a:t>
+              <a:t> del anteproyecto —de preferencia el método o el instrumento propuesto—.</a:t>
             </a:r>
           </a:p>
           <a:p>
@@ -5912,7 +5707,43 @@
                 </a:solidFill>
                 <a:latin typeface="Calibri"/>
               </a:rPr>
-              <a:t>–   Los comentarios que reciba y no aplique hoy, anótelos como pendientes con responsable.</a:t>
+              <a:t>–   </a:t>
+            </a:r>
+            <a:r>
+              <a:rPr sz="1600" b="1" i="0">
+                <a:solidFill>
+                  <a:srgbClr val="2B2B2B"/>
+                </a:solidFill>
+                <a:latin typeface="Calibri"/>
+              </a:rPr>
+              <a:t>Paso 2</a:t>
+            </a:r>
+            <a:r>
+              <a:rPr sz="1600" b="0" i="0">
+                <a:solidFill>
+                  <a:srgbClr val="2B2B2B"/>
+                </a:solidFill>
+                <a:latin typeface="Calibri"/>
+              </a:rPr>
+              <a:t> · Ubique la sección recibida en la </a:t>
+            </a:r>
+            <a:r>
+              <a:rPr sz="1600" b="1" i="0">
+                <a:solidFill>
+                  <a:srgbClr val="2B2B2B"/>
+                </a:solidFill>
+                <a:latin typeface="Calibri"/>
+              </a:rPr>
+              <a:t>rúbrica de cuatro criterios</a:t>
+            </a:r>
+            <a:r>
+              <a:rPr sz="1600" b="0" i="0">
+                <a:solidFill>
+                  <a:srgbClr val="2B2B2B"/>
+                </a:solidFill>
+                <a:latin typeface="Calibri"/>
+              </a:rPr>
+              <a:t> y marque un nivel por criterio.</a:t>
             </a:r>
           </a:p>
           <a:p>
@@ -5937,7 +5768,7 @@
                 </a:solidFill>
                 <a:latin typeface="Calibri"/>
               </a:rPr>
-              <a:t>Entrega:</a:t>
+              <a:t>Paso 3</a:t>
             </a:r>
             <a:r>
               <a:rPr sz="1600" b="0" i="0">
@@ -5946,14 +5777,170 @@
                 </a:solidFill>
                 <a:latin typeface="Calibri"/>
               </a:rPr>
-              <a:t> suba el archivo como `S11_CierreIntegracion_Apellidos` en [URL CDigital — campus del curso pendiente].</a:t>
-            </a:r>
-          </a:p>
-        </p:txBody>
-      </p:sp>
-      <p:sp>
-        <p:nvSpPr>
-          <p:cNvPr id="5" name="TextBox 4"/>
+              <a:t> · Escriba </a:t>
+            </a:r>
+            <a:r>
+              <a:rPr sz="1600" b="1" i="0">
+                <a:solidFill>
+                  <a:srgbClr val="2B2B2B"/>
+                </a:solidFill>
+                <a:latin typeface="Calibri"/>
+              </a:rPr>
+              <a:t>tres comentarios accionables</a:t>
+            </a:r>
+            <a:r>
+              <a:rPr sz="1600" b="0" i="0">
+                <a:solidFill>
+                  <a:srgbClr val="2B2B2B"/>
+                </a:solidFill>
+                <a:latin typeface="Calibri"/>
+              </a:rPr>
+              <a:t>, uno por criterio distinto, con la fórmula observación + ubicación + acción.</a:t>
+            </a:r>
+          </a:p>
+          <a:p>
+            <a:pPr>
+              <a:spcAft>
+                <a:spcPts val="1000"/>
+              </a:spcAft>
+            </a:pPr>
+            <a:r>
+              <a:rPr sz="1600" b="0" i="0">
+                <a:solidFill>
+                  <a:srgbClr val="2B2B2B"/>
+                </a:solidFill>
+                <a:latin typeface="Calibri"/>
+              </a:rPr>
+              <a:t>–   </a:t>
+            </a:r>
+            <a:r>
+              <a:rPr sz="1600" b="1" i="0">
+                <a:solidFill>
+                  <a:srgbClr val="2B2B2B"/>
+                </a:solidFill>
+                <a:latin typeface="Calibri"/>
+              </a:rPr>
+              <a:t>Paso 4</a:t>
+            </a:r>
+            <a:r>
+              <a:rPr sz="1600" b="0" i="0">
+                <a:solidFill>
+                  <a:srgbClr val="2B2B2B"/>
+                </a:solidFill>
+                <a:latin typeface="Calibri"/>
+              </a:rPr>
+              <a:t> · Devuelva los comentarios al equipo autor y reciba los suyos.</a:t>
+            </a:r>
+          </a:p>
+          <a:p>
+            <a:pPr>
+              <a:spcAft>
+                <a:spcPts val="1000"/>
+              </a:spcAft>
+            </a:pPr>
+            <a:r>
+              <a:rPr sz="1600" b="0" i="0">
+                <a:solidFill>
+                  <a:srgbClr val="2B2B2B"/>
+                </a:solidFill>
+                <a:latin typeface="Calibri"/>
+              </a:rPr>
+              <a:t>–   </a:t>
+            </a:r>
+            <a:r>
+              <a:rPr sz="1600" b="1" i="0">
+                <a:solidFill>
+                  <a:srgbClr val="2B2B2B"/>
+                </a:solidFill>
+                <a:latin typeface="Calibri"/>
+              </a:rPr>
+              <a:t>Paso 5</a:t>
+            </a:r>
+            <a:r>
+              <a:rPr sz="1600" b="0" i="0">
+                <a:solidFill>
+                  <a:srgbClr val="2B2B2B"/>
+                </a:solidFill>
+                <a:latin typeface="Calibri"/>
+              </a:rPr>
+              <a:t> · </a:t>
+            </a:r>
+            <a:r>
+              <a:rPr sz="1600" b="1" i="0">
+                <a:solidFill>
+                  <a:srgbClr val="2B2B2B"/>
+                </a:solidFill>
+                <a:latin typeface="Calibri"/>
+              </a:rPr>
+              <a:t>Aplique de inmediato</a:t>
+            </a:r>
+            <a:r>
+              <a:rPr sz="1600" b="0" i="0">
+                <a:solidFill>
+                  <a:srgbClr val="2B2B2B"/>
+                </a:solidFill>
+                <a:latin typeface="Calibri"/>
+              </a:rPr>
+              <a:t>, en su propio documento, al menos las mejoras claramente pertinentes.</a:t>
+            </a:r>
+          </a:p>
+          <a:p>
+            <a:pPr>
+              <a:spcAft>
+                <a:spcPts val="1000"/>
+              </a:spcAft>
+            </a:pPr>
+            <a:r>
+              <a:rPr sz="1600" b="0" i="0">
+                <a:solidFill>
+                  <a:srgbClr val="2B2B2B"/>
+                </a:solidFill>
+                <a:latin typeface="Calibri"/>
+              </a:rPr>
+              <a:t>–   </a:t>
+            </a:r>
+            <a:r>
+              <a:rPr sz="1600" b="1" i="0">
+                <a:solidFill>
+                  <a:srgbClr val="2B2B2B"/>
+                </a:solidFill>
+                <a:latin typeface="Calibri"/>
+              </a:rPr>
+              <a:t>En clase, sin falta:</a:t>
+            </a:r>
+            <a:r>
+              <a:rPr sz="1600" b="0" i="0">
+                <a:solidFill>
+                  <a:srgbClr val="2B2B2B"/>
+                </a:solidFill>
+                <a:latin typeface="Calibri"/>
+              </a:rPr>
+              <a:t> los </a:t>
+            </a:r>
+            <a:r>
+              <a:rPr sz="1600" b="1" i="0">
+                <a:solidFill>
+                  <a:srgbClr val="2B2B2B"/>
+                </a:solidFill>
+                <a:latin typeface="Calibri"/>
+              </a:rPr>
+              <a:t>pasos 1 a 4</a:t>
+            </a:r>
+            <a:r>
+              <a:rPr sz="1600" b="0" i="0">
+                <a:solidFill>
+                  <a:srgbClr val="2B2B2B"/>
+                </a:solidFill>
+                <a:latin typeface="Calibri"/>
+              </a:rPr>
+              <a:t>. Del 5 en adelante puede quedar en trabajo autónomo, pero antes de la próxima sesión.</a:t>
+            </a:r>
+          </a:p>
+        </p:txBody>
+      </p:sp>
+      <p:sp>
+        <p:nvSpPr>
+          <p:cNvPr id="6" name="TextBox 5"/>
           <p:cNvSpPr txBox="1"/>
           <p:nvPr/>
         </p:nvSpPr>
@@ -6086,7 +6073,7 @@
                 </a:solidFill>
                 <a:latin typeface="Calibri"/>
               </a:rPr>
-              <a:t>Puente a Proyecto II: lo que queda listo y lo que NO se hizo</a:t>
+              <a:t>TALLER · cómo se revisa y dónde se entrega</a:t>
             </a:r>
           </a:p>
         </p:txBody>
@@ -6099,8 +6086,8 @@
         </p:nvSpPr>
         <p:spPr>
           <a:xfrm>
-            <a:off x="640080" y="1691639"/>
-            <a:ext cx="10911535" cy="4617720"/>
+            <a:off x="640080" y="1280160"/>
+            <a:ext cx="10911535" cy="411480"/>
           </a:xfrm>
           <a:prstGeom prst="rect">
             <a:avLst/>
@@ -6113,6 +6100,41 @@
           </a:bodyPr>
           <a:lstStyle/>
           <a:p>
+            <a:pPr algn="ctr"/>
+            <a:r>
+              <a:rPr sz="1500" b="0" i="0">
+                <a:solidFill>
+                  <a:srgbClr val="2B2B2B"/>
+                </a:solidFill>
+                <a:latin typeface="Calibri"/>
+              </a:rPr>
+              <a:t>Coevaluación entre pares y ajustes</a:t>
+            </a:r>
+          </a:p>
+        </p:txBody>
+      </p:sp>
+      <p:sp>
+        <p:nvSpPr>
+          <p:cNvPr id="5" name="TextBox 4"/>
+          <p:cNvSpPr txBox="1"/>
+          <p:nvPr/>
+        </p:nvSpPr>
+        <p:spPr>
+          <a:xfrm>
+            <a:off x="640080" y="2011679"/>
+            <a:ext cx="10911535" cy="4297680"/>
+          </a:xfrm>
+          <a:prstGeom prst="rect">
+            <a:avLst/>
+          </a:prstGeom>
+          <a:noFill/>
+        </p:spPr>
+        <p:txBody>
+          <a:bodyPr wrap="square" anchor="t" lIns="0" rIns="0" tIns="0" bIns="0">
+            <a:spAutoFit/>
+          </a:bodyPr>
+          <a:lstStyle/>
+          <a:p>
             <a:pPr>
               <a:spcAft>
                 <a:spcPts val="1000"/>
@@ -6125,7 +6147,7 @@
                 </a:solidFill>
                 <a:latin typeface="Calibri"/>
               </a:rPr>
-              <a:t>–   El cierre honesto de un anteproyecto </a:t>
+              <a:t>–   </a:t>
             </a:r>
             <a:r>
               <a:rPr sz="1600" b="1" i="0">
@@ -6134,7 +6156,7 @@
                 </a:solidFill>
                 <a:latin typeface="Calibri"/>
               </a:rPr>
-              <a:t>declara sus dos caras</a:t>
+              <a:t>Quedó bien si</a:t>
             </a:r>
             <a:r>
               <a:rPr sz="1600" b="0" i="0">
@@ -6143,7 +6165,75 @@
                 </a:solidFill>
                 <a:latin typeface="Calibri"/>
               </a:rPr>
-              <a:t>, y eso se valora.</a:t>
+              <a:t> —compruébelo usted antes de cerrar el documento—:</a:t>
+            </a:r>
+          </a:p>
+          <a:p>
+            <a:pPr lvl="1">
+              <a:spcAft>
+                <a:spcPts val="600"/>
+              </a:spcAft>
+            </a:pPr>
+            <a:r>
+              <a:rPr sz="1500" b="0" i="0">
+                <a:solidFill>
+                  <a:srgbClr val="2B2B2B"/>
+                </a:solidFill>
+                <a:latin typeface="Calibri"/>
+              </a:rPr>
+              <a:t>●   Su documento tiene </a:t>
+            </a:r>
+            <a:r>
+              <a:rPr sz="1500" b="1" i="0">
+                <a:solidFill>
+                  <a:srgbClr val="2B2B2B"/>
+                </a:solidFill>
+                <a:latin typeface="Calibri"/>
+              </a:rPr>
+              <a:t>tres mejoras concretas aplicadas</a:t>
+            </a:r>
+            <a:r>
+              <a:rPr sz="1500" b="0" i="0">
+                <a:solidFill>
+                  <a:srgbClr val="2B2B2B"/>
+                </a:solidFill>
+                <a:latin typeface="Calibri"/>
+              </a:rPr>
+              <a:t> y usted puede señalarlas en pantalla.</a:t>
+            </a:r>
+          </a:p>
+          <a:p>
+            <a:pPr lvl="1">
+              <a:spcAft>
+                <a:spcPts val="600"/>
+              </a:spcAft>
+            </a:pPr>
+            <a:r>
+              <a:rPr sz="1500" b="0" i="0">
+                <a:solidFill>
+                  <a:srgbClr val="2B2B2B"/>
+                </a:solidFill>
+                <a:latin typeface="Calibri"/>
+              </a:rPr>
+              <a:t>●   Los comentarios que recibió y no aplicó hoy quedaron anotados </a:t>
+            </a:r>
+            <a:r>
+              <a:rPr sz="1500" b="1" i="0">
+                <a:solidFill>
+                  <a:srgbClr val="2B2B2B"/>
+                </a:solidFill>
+                <a:latin typeface="Calibri"/>
+              </a:rPr>
+              <a:t>como pendientes con responsable</a:t>
+            </a:r>
+            <a:r>
+              <a:rPr sz="1500" b="0" i="0">
+                <a:solidFill>
+                  <a:srgbClr val="2B2B2B"/>
+                </a:solidFill>
+                <a:latin typeface="Calibri"/>
+              </a:rPr>
+              <a:t>.</a:t>
             </a:r>
           </a:p>
           <a:p>
@@ -6168,71 +6258,16 @@
                 </a:solidFill>
                 <a:latin typeface="Calibri"/>
               </a:rPr>
-              <a:t>Lo que queda listo para ejecutar apenas haya aval:</a:t>
-            </a:r>
-          </a:p>
-          <a:p>
-            <a:pPr lvl="1">
-              <a:spcAft>
-                <a:spcPts val="600"/>
-              </a:spcAft>
-            </a:pPr>
-            <a:r>
-              <a:rPr sz="1500" b="0" i="0">
-                <a:solidFill>
-                  <a:srgbClr val="2B2B2B"/>
-                </a:solidFill>
-                <a:latin typeface="Calibri"/>
-              </a:rPr>
-              <a:t>●   Problema delimitado, pregunta única y objetivos alineados.</a:t>
-            </a:r>
-          </a:p>
-          <a:p>
-            <a:pPr lvl="1">
-              <a:spcAft>
-                <a:spcPts val="600"/>
-              </a:spcAft>
-            </a:pPr>
-            <a:r>
-              <a:rPr sz="1500" b="0" i="0">
-                <a:solidFill>
-                  <a:srgbClr val="2B2B2B"/>
-                </a:solidFill>
-                <a:latin typeface="Calibri"/>
-              </a:rPr>
-              <a:t>●   Marco referencial completo con referencias en APA 7 verificadas.</a:t>
-            </a:r>
-          </a:p>
-          <a:p>
-            <a:pPr lvl="1">
-              <a:spcAft>
-                <a:spcPts val="600"/>
-              </a:spcAft>
-            </a:pPr>
-            <a:r>
-              <a:rPr sz="1500" b="0" i="0">
-                <a:solidFill>
-                  <a:srgbClr val="2B2B2B"/>
-                </a:solidFill>
-                <a:latin typeface="Calibri"/>
-              </a:rPr>
-              <a:t>●   Diseño metodológico justificado e instrumento propuesto, con su matriz de alineación.</a:t>
-            </a:r>
-          </a:p>
-          <a:p>
-            <a:pPr lvl="1">
-              <a:spcAft>
-                <a:spcPts val="600"/>
-              </a:spcAft>
-            </a:pPr>
-            <a:r>
-              <a:rPr sz="1500" b="0" i="0">
-                <a:solidFill>
-                  <a:srgbClr val="2B2B2B"/>
-                </a:solidFill>
-                <a:latin typeface="Calibri"/>
-              </a:rPr>
-              <a:t>●   Cronograma por fases, análisis de viabilidad y previsión de permisos.</a:t>
+              <a:t>Plan B:</a:t>
+            </a:r>
+            <a:r>
+              <a:rPr sz="1600" b="0" i="0">
+                <a:solidFill>
+                  <a:srgbClr val="2B2B2B"/>
+                </a:solidFill>
+                <a:latin typeface="Calibri"/>
+              </a:rPr>
+              <a:t> Si un comentario que recibió no le parece pertinente, no lo aplique: anótelo con la razón por la que lo descarta. Eso también es coevaluación.</a:t>
             </a:r>
           </a:p>
           <a:p>
@@ -6257,23 +6292,52 @@
                 </a:solidFill>
                 <a:latin typeface="Calibri"/>
               </a:rPr>
-              <a:t>Lo que NO se hizo, y está bien que no se haya hecho:</a:t>
-            </a:r>
-          </a:p>
-          <a:p>
-            <a:pPr lvl="1">
-              <a:spcAft>
-                <a:spcPts val="600"/>
-              </a:spcAft>
-            </a:pPr>
-            <a:r>
-              <a:rPr sz="1500" b="0" i="0">
-                <a:solidFill>
-                  <a:srgbClr val="2B2B2B"/>
-                </a:solidFill>
-                <a:latin typeface="Calibri"/>
-              </a:rPr>
-              <a:t>●   Todo el trabajo de campo: aplicación de instrumentos, recolección, análisis de datos reales y resultados.</a:t>
+              <a:t>Las entregas documentales del aula ya cerraron:</a:t>
+            </a:r>
+            <a:r>
+              <a:rPr sz="1600" b="0" i="0">
+                <a:solidFill>
+                  <a:srgbClr val="2B2B2B"/>
+                </a:solidFill>
+                <a:latin typeface="Calibri"/>
+              </a:rPr>
+              <a:t> la </a:t>
+            </a:r>
+            <a:r>
+              <a:rPr sz="1600" b="1" i="0">
+                <a:solidFill>
+                  <a:srgbClr val="2B2B2B"/>
+                </a:solidFill>
+                <a:latin typeface="Calibri"/>
+              </a:rPr>
+              <a:t>ACA FINAL</a:t>
+            </a:r>
+            <a:r>
+              <a:rPr sz="1600" b="0" i="0">
+                <a:solidFill>
+                  <a:srgbClr val="2B2B2B"/>
+                </a:solidFill>
+                <a:latin typeface="Calibri"/>
+              </a:rPr>
+              <a:t> cerró en la semana de la </a:t>
+            </a:r>
+            <a:r>
+              <a:rPr sz="1600" b="1" i="0">
+                <a:solidFill>
+                  <a:srgbClr val="2B2B2B"/>
+                </a:solidFill>
+                <a:latin typeface="Calibri"/>
+              </a:rPr>
+              <a:t>Sesión 10</a:t>
+            </a:r>
+            <a:r>
+              <a:rPr sz="1600" b="0" i="0">
+                <a:solidFill>
+                  <a:srgbClr val="2B2B2B"/>
+                </a:solidFill>
+                <a:latin typeface="Calibri"/>
+              </a:rPr>
+              <a:t>. Guarde `S11_CierreIntegracion_Apellidos` (Google Doc o PDF) en su Drive.</a:t>
             </a:r>
           </a:p>
           <a:p>
@@ -6289,7 +6353,7 @@
                 </a:solidFill>
                 <a:latin typeface="Calibri"/>
               </a:rPr>
-              <a:t>–   Ese "lo que falta" </a:t>
+              <a:t>–   </a:t>
             </a:r>
             <a:r>
               <a:rPr sz="1600" b="1" i="0">
@@ -6298,7 +6362,7 @@
                 </a:solidFill>
                 <a:latin typeface="Calibri"/>
               </a:rPr>
-              <a:t>no es una debilidad</a:t>
+              <a:t>Esta semana el aula sí espera:</a:t>
             </a:r>
             <a:r>
               <a:rPr sz="1600" b="0" i="0">
@@ -6307,14 +6371,86 @@
                 </a:solidFill>
                 <a:latin typeface="Calibri"/>
               </a:rPr>
-              <a:t>: es el alcance correcto de Proyecto I. Escríbalo así, con esas palabras, al cerrar el documento.</a:t>
-            </a:r>
-          </a:p>
-        </p:txBody>
-      </p:sp>
-      <p:sp>
-        <p:nvSpPr>
-          <p:cNvPr id="5" name="TextBox 4"/>
+              <a:t> </a:t>
+            </a:r>
+            <a:r>
+              <a:rPr sz="1600" b="1" i="0">
+                <a:solidFill>
+                  <a:srgbClr val="2B2B2B"/>
+                </a:solidFill>
+                <a:latin typeface="Calibri"/>
+              </a:rPr>
+              <a:t>Autoevaluación</a:t>
+            </a:r>
+            <a:r>
+              <a:rPr sz="1600" b="0" i="0">
+                <a:solidFill>
+                  <a:srgbClr val="2B2B2B"/>
+                </a:solidFill>
+                <a:latin typeface="Calibri"/>
+              </a:rPr>
+              <a:t> (4%) y </a:t>
+            </a:r>
+            <a:r>
+              <a:rPr sz="1600" b="1" i="0">
+                <a:solidFill>
+                  <a:srgbClr val="2B2B2B"/>
+                </a:solidFill>
+                <a:latin typeface="Calibri"/>
+              </a:rPr>
+              <a:t>Coevaluación</a:t>
+            </a:r>
+            <a:r>
+              <a:rPr sz="1600" b="0" i="0">
+                <a:solidFill>
+                  <a:srgbClr val="2B2B2B"/>
+                </a:solidFill>
+                <a:latin typeface="Calibri"/>
+              </a:rPr>
+              <a:t> (4%). Eso se responde </a:t>
+            </a:r>
+            <a:r>
+              <a:rPr sz="1600" b="1" i="0">
+                <a:solidFill>
+                  <a:srgbClr val="2B2B2B"/>
+                </a:solidFill>
+                <a:latin typeface="Calibri"/>
+              </a:rPr>
+              <a:t>en </a:t>
+            </a:r>
+            <a:r>
+              <a:rPr sz="1600" b="0" i="0">
+                <a:solidFill>
+                  <a:srgbClr val="2B2B2B"/>
+                </a:solidFill>
+                <a:latin typeface="Calibri"/>
+              </a:rPr>
+              <a:t>CDigital</a:t>
+            </a:r>
+            <a:r>
+              <a:rPr sz="1600" b="1" i="0">
+                <a:solidFill>
+                  <a:srgbClr val="2B2B2B"/>
+                </a:solidFill>
+                <a:latin typeface="Calibri"/>
+              </a:rPr>
+              <a:t/>
+            </a:r>
+            <a:r>
+              <a:rPr sz="1600" b="0" i="0">
+                <a:solidFill>
+                  <a:srgbClr val="2B2B2B"/>
+                </a:solidFill>
+                <a:latin typeface="Calibri"/>
+              </a:rPr>
+              <a:t>, no se sube como archivo.</a:t>
+            </a:r>
+          </a:p>
+        </p:txBody>
+      </p:sp>
+      <p:sp>
+        <p:nvSpPr>
+          <p:cNvPr id="6" name="TextBox 5"/>
           <p:cNvSpPr txBox="1"/>
           <p:nvPr/>
         </p:nvSpPr>
@@ -6447,7 +6583,7 @@
                 </a:solidFill>
                 <a:latin typeface="Calibri"/>
               </a:rPr>
-              <a:t>Checklist final antes de subir el anteproyecto</a:t>
+              <a:t>Puente a Proyecto II: lo que queda listo y lo que NO se hizo</a:t>
             </a:r>
           </a:p>
         </p:txBody>
@@ -6486,7 +6622,7 @@
                 </a:solidFill>
                 <a:latin typeface="Calibri"/>
               </a:rPr>
-              <a:t>–   Las </a:t>
+              <a:t>–   El cierre honesto de un anteproyecto </a:t>
             </a:r>
             <a:r>
               <a:rPr sz="1600" b="1" i="0">
@@ -6495,7 +6631,7 @@
                 </a:solidFill>
                 <a:latin typeface="Calibri"/>
               </a:rPr>
-              <a:t>tres preguntas de oro</a:t>
+              <a:t>declara sus dos caras</a:t>
             </a:r>
             <a:r>
               <a:rPr sz="1600" b="0" i="0">
@@ -6504,7 +6640,7 @@
                 </a:solidFill>
                 <a:latin typeface="Calibri"/>
               </a:rPr>
-              <a:t> dan sí: una sola historia, APA estable, instrumentos claramente propuestos.</a:t>
+              <a:t>, y eso se valora.</a:t>
             </a:r>
           </a:p>
           <a:p>
@@ -6520,7 +6656,7 @@
                 </a:solidFill>
                 <a:latin typeface="Calibri"/>
               </a:rPr>
-              <a:t>–   Las </a:t>
+              <a:t>–   </a:t>
             </a:r>
             <a:r>
               <a:rPr sz="1600" b="1" i="0">
@@ -6529,16 +6665,71 @@
                 </a:solidFill>
                 <a:latin typeface="Calibri"/>
               </a:rPr>
-              <a:t>ocho secciones</a:t>
-            </a:r>
-            <a:r>
-              <a:rPr sz="1600" b="0" i="0">
-                <a:solidFill>
-                  <a:srgbClr val="2B2B2B"/>
-                </a:solidFill>
-                <a:latin typeface="Calibri"/>
-              </a:rPr>
-              <a:t> del checklist están presentes y las puedo ubicar por página.</a:t>
+              <a:t>Lo que queda listo para ejecutar apenas haya aval:</a:t>
+            </a:r>
+          </a:p>
+          <a:p>
+            <a:pPr lvl="1">
+              <a:spcAft>
+                <a:spcPts val="600"/>
+              </a:spcAft>
+            </a:pPr>
+            <a:r>
+              <a:rPr sz="1500" b="0" i="0">
+                <a:solidFill>
+                  <a:srgbClr val="2B2B2B"/>
+                </a:solidFill>
+                <a:latin typeface="Calibri"/>
+              </a:rPr>
+              <a:t>●   Problema delimitado, pregunta única y objetivos alineados.</a:t>
+            </a:r>
+          </a:p>
+          <a:p>
+            <a:pPr lvl="1">
+              <a:spcAft>
+                <a:spcPts val="600"/>
+              </a:spcAft>
+            </a:pPr>
+            <a:r>
+              <a:rPr sz="1500" b="0" i="0">
+                <a:solidFill>
+                  <a:srgbClr val="2B2B2B"/>
+                </a:solidFill>
+                <a:latin typeface="Calibri"/>
+              </a:rPr>
+              <a:t>●   Marco referencial completo con referencias en APA 7 verificadas.</a:t>
+            </a:r>
+          </a:p>
+          <a:p>
+            <a:pPr lvl="1">
+              <a:spcAft>
+                <a:spcPts val="600"/>
+              </a:spcAft>
+            </a:pPr>
+            <a:r>
+              <a:rPr sz="1500" b="0" i="0">
+                <a:solidFill>
+                  <a:srgbClr val="2B2B2B"/>
+                </a:solidFill>
+                <a:latin typeface="Calibri"/>
+              </a:rPr>
+              <a:t>●   Diseño metodológico justificado e instrumento propuesto, con su matriz de alineación.</a:t>
+            </a:r>
+          </a:p>
+          <a:p>
+            <a:pPr lvl="1">
+              <a:spcAft>
+                <a:spcPts val="600"/>
+              </a:spcAft>
+            </a:pPr>
+            <a:r>
+              <a:rPr sz="1500" b="0" i="0">
+                <a:solidFill>
+                  <a:srgbClr val="2B2B2B"/>
+                </a:solidFill>
+                <a:latin typeface="Calibri"/>
+              </a:rPr>
+              <a:t>●   Cronograma por fases, análisis de viabilidad y previsión de permisos.</a:t>
             </a:r>
           </a:p>
           <a:p>
@@ -6554,7 +6745,7 @@
                 </a:solidFill>
                 <a:latin typeface="Calibri"/>
               </a:rPr>
-              <a:t>–   La </a:t>
+              <a:t>–   </a:t>
             </a:r>
             <a:r>
               <a:rPr sz="1600" b="1" i="0">
@@ -6563,16 +6754,23 @@
                 </a:solidFill>
                 <a:latin typeface="Calibri"/>
               </a:rPr>
-              <a:t>prueba del hilo</a:t>
-            </a:r>
-            <a:r>
-              <a:rPr sz="1600" b="0" i="0">
-                <a:solidFill>
-                  <a:srgbClr val="2B2B2B"/>
-                </a:solidFill>
-                <a:latin typeface="Calibri"/>
-              </a:rPr>
-              <a:t> en seis frases se lee sin que yo tenga que explicar nada por fuera del texto.</a:t>
+              <a:t>Lo que NO se hizo, y está bien que no se haya hecho:</a:t>
+            </a:r>
+          </a:p>
+          <a:p>
+            <a:pPr lvl="1">
+              <a:spcAft>
+                <a:spcPts val="600"/>
+              </a:spcAft>
+            </a:pPr>
+            <a:r>
+              <a:rPr sz="1500" b="0" i="0">
+                <a:solidFill>
+                  <a:srgbClr val="2B2B2B"/>
+                </a:solidFill>
+                <a:latin typeface="Calibri"/>
+              </a:rPr>
+              <a:t>●   Todo el trabajo de campo: aplicación de instrumentos, recolección, análisis de datos reales y resultados.</a:t>
             </a:r>
           </a:p>
           <a:p>
@@ -6588,7 +6786,7 @@
                 </a:solidFill>
                 <a:latin typeface="Calibri"/>
               </a:rPr>
-              <a:t>–   Apliqué al menos </a:t>
+              <a:t>–   Ese "lo que falta" </a:t>
             </a:r>
             <a:r>
               <a:rPr sz="1600" b="1" i="0">
@@ -6597,7 +6795,7 @@
                 </a:solidFill>
                 <a:latin typeface="Calibri"/>
               </a:rPr>
-              <a:t>tres mejoras</a:t>
+              <a:t>no es una debilidad</a:t>
             </a:r>
             <a:r>
               <a:rPr sz="1600" b="0" i="0">
@@ -6606,195 +6804,7 @@
                 </a:solidFill>
                 <a:latin typeface="Calibri"/>
               </a:rPr>
-              <a:t> surgidas de la lectura de mis pares.</a:t>
-            </a:r>
-          </a:p>
-          <a:p>
-            <a:pPr>
-              <a:spcAft>
-                <a:spcPts val="1000"/>
-              </a:spcAft>
-            </a:pPr>
-            <a:r>
-              <a:rPr sz="1600" b="0" i="0">
-                <a:solidFill>
-                  <a:srgbClr val="2B2B2B"/>
-                </a:solidFill>
-                <a:latin typeface="Calibri"/>
-              </a:rPr>
-              <a:t>–   Todos los verbos del método y del instrumento están en </a:t>
-            </a:r>
-            <a:r>
-              <a:rPr sz="1600" b="1" i="0">
-                <a:solidFill>
-                  <a:srgbClr val="2B2B2B"/>
-                </a:solidFill>
-                <a:latin typeface="Calibri"/>
-              </a:rPr>
-              <a:t>condicional o futuro</a:t>
-            </a:r>
-            <a:r>
-              <a:rPr sz="1600" b="0" i="0">
-                <a:solidFill>
-                  <a:srgbClr val="2B2B2B"/>
-                </a:solidFill>
-                <a:latin typeface="Calibri"/>
-              </a:rPr>
-              <a:t>.</a:t>
-            </a:r>
-          </a:p>
-          <a:p>
-            <a:pPr>
-              <a:spcAft>
-                <a:spcPts val="1000"/>
-              </a:spcAft>
-            </a:pPr>
-            <a:r>
-              <a:rPr sz="1600" b="0" i="0">
-                <a:solidFill>
-                  <a:srgbClr val="2B2B2B"/>
-                </a:solidFill>
-                <a:latin typeface="Calibri"/>
-              </a:rPr>
-              <a:t>–   El documento está en </a:t>
-            </a:r>
-            <a:r>
-              <a:rPr sz="1600" b="1" i="0">
-                <a:solidFill>
-                  <a:srgbClr val="2B2B2B"/>
-                </a:solidFill>
-                <a:latin typeface="Calibri"/>
-              </a:rPr>
-              <a:t>un solo archivo</a:t>
-            </a:r>
-            <a:r>
-              <a:rPr sz="1600" b="0" i="0">
-                <a:solidFill>
-                  <a:srgbClr val="2B2B2B"/>
-                </a:solidFill>
-                <a:latin typeface="Calibri"/>
-              </a:rPr>
-              <a:t>, con índice automático, formato y voz unificados.</a:t>
-            </a:r>
-          </a:p>
-          <a:p>
-            <a:pPr>
-              <a:spcAft>
-                <a:spcPts val="1000"/>
-              </a:spcAft>
-            </a:pPr>
-            <a:r>
-              <a:rPr sz="1600" b="0" i="0">
-                <a:solidFill>
-                  <a:srgbClr val="2B2B2B"/>
-                </a:solidFill>
-                <a:latin typeface="Calibri"/>
-              </a:rPr>
-              <a:t>–   Las </a:t>
-            </a:r>
-            <a:r>
-              <a:rPr sz="1600" b="1" i="0">
-                <a:solidFill>
-                  <a:srgbClr val="2B2B2B"/>
-                </a:solidFill>
-                <a:latin typeface="Calibri"/>
-              </a:rPr>
-              <a:t>correcciones de todos los avances anteriores</a:t>
-            </a:r>
-            <a:r>
-              <a:rPr sz="1600" b="0" i="0">
-                <a:solidFill>
-                  <a:srgbClr val="2B2B2B"/>
-                </a:solidFill>
-                <a:latin typeface="Calibri"/>
-              </a:rPr>
-              <a:t> están efectivamente incorporadas.</a:t>
-            </a:r>
-          </a:p>
-          <a:p>
-            <a:pPr>
-              <a:spcAft>
-                <a:spcPts val="1000"/>
-              </a:spcAft>
-            </a:pPr>
-            <a:r>
-              <a:rPr sz="1600" b="0" i="0">
-                <a:solidFill>
-                  <a:srgbClr val="2B2B2B"/>
-                </a:solidFill>
-                <a:latin typeface="Calibri"/>
-              </a:rPr>
-              <a:t>–   Cerré el documento con el párrafo de </a:t>
-            </a:r>
-            <a:r>
-              <a:rPr sz="1600" b="1" i="0">
-                <a:solidFill>
-                  <a:srgbClr val="2B2B2B"/>
-                </a:solidFill>
-                <a:latin typeface="Calibri"/>
-              </a:rPr>
-              <a:t>alcance de Proyecto I y puente a Proyecto II</a:t>
-            </a:r>
-            <a:r>
-              <a:rPr sz="1600" b="0" i="0">
-                <a:solidFill>
-                  <a:srgbClr val="2B2B2B"/>
-                </a:solidFill>
-                <a:latin typeface="Calibri"/>
-              </a:rPr>
-              <a:t>.</a:t>
-            </a:r>
-          </a:p>
-          <a:p>
-            <a:pPr>
-              <a:spcAft>
-                <a:spcPts val="1000"/>
-              </a:spcAft>
-            </a:pPr>
-            <a:r>
-              <a:rPr sz="1600" b="0" i="0">
-                <a:solidFill>
-                  <a:srgbClr val="2B2B2B"/>
-                </a:solidFill>
-                <a:latin typeface="Calibri"/>
-              </a:rPr>
-              <a:t>–   Diligencié la </a:t>
-            </a:r>
-            <a:r>
-              <a:rPr sz="1600" b="1" i="0">
-                <a:solidFill>
-                  <a:srgbClr val="2B2B2B"/>
-                </a:solidFill>
-                <a:latin typeface="Calibri"/>
-              </a:rPr>
-              <a:t>coevaluación</a:t>
-            </a:r>
-            <a:r>
-              <a:rPr sz="1600" b="0" i="0">
-                <a:solidFill>
-                  <a:srgbClr val="2B2B2B"/>
-                </a:solidFill>
-                <a:latin typeface="Calibri"/>
-              </a:rPr>
-              <a:t> y la </a:t>
-            </a:r>
-            <a:r>
-              <a:rPr sz="1600" b="1" i="0">
-                <a:solidFill>
-                  <a:srgbClr val="2B2B2B"/>
-                </a:solidFill>
-                <a:latin typeface="Calibri"/>
-              </a:rPr>
-              <a:t>autoevaluación</a:t>
-            </a:r>
-            <a:r>
-              <a:rPr sz="1600" b="0" i="0">
-                <a:solidFill>
-                  <a:srgbClr val="2B2B2B"/>
-                </a:solidFill>
-                <a:latin typeface="Calibri"/>
-              </a:rPr>
-              <a:t> en CDigital, cada una en su ventana.</a:t>
+              <a:t>: es el alcance correcto de Proyecto I. Escríbalo así, con esas palabras, al cerrar el documento.</a:t>
             </a:r>
           </a:p>
         </p:txBody>
@@ -6934,7 +6944,7 @@
                 </a:solidFill>
                 <a:latin typeface="Calibri"/>
               </a:rPr>
-              <a:t>Trabajo autónomo y cierre del ciclo sincrónico</a:t>
+              <a:t>Checklist final antes de subir el anteproyecto</a:t>
             </a:r>
           </a:p>
         </p:txBody>
@@ -6973,7 +6983,7 @@
                 </a:solidFill>
                 <a:latin typeface="Calibri"/>
               </a:rPr>
-              <a:t>–   </a:t>
+              <a:t>–   Las </a:t>
             </a:r>
             <a:r>
               <a:rPr sz="1600" b="1" i="0">
@@ -6982,107 +6992,16 @@
                 </a:solidFill>
                 <a:latin typeface="Calibri"/>
               </a:rPr>
-              <a:t>Autónomo hasta el cierre del curso:</a:t>
-            </a:r>
-          </a:p>
-          <a:p>
-            <a:pPr lvl="1">
-              <a:spcAft>
-                <a:spcPts val="600"/>
-              </a:spcAft>
-            </a:pPr>
-            <a:r>
-              <a:rPr sz="1500" b="0" i="0">
-                <a:solidFill>
-                  <a:srgbClr val="2B2B2B"/>
-                </a:solidFill>
-                <a:latin typeface="Calibri"/>
-              </a:rPr>
-              <a:t>●   Pulido final del anteproyecto: aplique los pendientes que anotó hoy, en orden de impacto.</a:t>
-            </a:r>
-          </a:p>
-          <a:p>
-            <a:pPr lvl="1">
-              <a:spcAft>
-                <a:spcPts val="600"/>
-              </a:spcAft>
-            </a:pPr>
-            <a:r>
-              <a:rPr sz="1500" b="0" i="0">
-                <a:solidFill>
-                  <a:srgbClr val="2B2B2B"/>
-                </a:solidFill>
-                <a:latin typeface="Calibri"/>
-              </a:rPr>
-              <a:t>●   Lectura final de corrido, en voz alta, con el checklist de las ocho secciones al lado.</a:t>
-            </a:r>
-          </a:p>
-          <a:p>
-            <a:pPr lvl="1">
-              <a:spcAft>
-                <a:spcPts val="600"/>
-              </a:spcAft>
-            </a:pPr>
-            <a:r>
-              <a:rPr sz="1500" b="0" i="0">
-                <a:solidFill>
-                  <a:srgbClr val="2B2B2B"/>
-                </a:solidFill>
-                <a:latin typeface="Calibri"/>
-              </a:rPr>
-              <a:t>●   Última verificación cruzada de referencias </a:t>
-            </a:r>
-            <a:r>
-              <a:rPr sz="1500" b="1" i="0">
-                <a:solidFill>
-                  <a:srgbClr val="2B2B2B"/>
-                </a:solidFill>
-                <a:latin typeface="Calibri"/>
-              </a:rPr>
-              <a:t>después</a:t>
-            </a:r>
-            <a:r>
-              <a:rPr sz="1500" b="0" i="0">
-                <a:solidFill>
-                  <a:srgbClr val="2B2B2B"/>
-                </a:solidFill>
-                <a:latin typeface="Calibri"/>
-              </a:rPr>
-              <a:t> de la edición final.</a:t>
-            </a:r>
-          </a:p>
-          <a:p>
-            <a:pPr lvl="1">
-              <a:spcAft>
-                <a:spcPts val="600"/>
-              </a:spcAft>
-            </a:pPr>
-            <a:r>
-              <a:rPr sz="1500" b="0" i="0">
-                <a:solidFill>
-                  <a:srgbClr val="2B2B2B"/>
-                </a:solidFill>
-                <a:latin typeface="Calibri"/>
-              </a:rPr>
-              <a:t>●   Diligencie en </a:t>
-            </a:r>
-            <a:r>
-              <a:rPr sz="1500" b="1" i="0">
-                <a:solidFill>
-                  <a:srgbClr val="2B2B2B"/>
-                </a:solidFill>
-                <a:latin typeface="Calibri"/>
-              </a:rPr>
-              <a:t>CDigital</a:t>
-            </a:r>
-            <a:r>
-              <a:rPr sz="1500" b="0" i="0">
-                <a:solidFill>
-                  <a:srgbClr val="2B2B2B"/>
-                </a:solidFill>
-                <a:latin typeface="Calibri"/>
-              </a:rPr>
-              <a:t> la coevaluación y la autoevaluación, cada una en su ventana. Son individuales.</a:t>
+              <a:t>tres preguntas de oro</a:t>
+            </a:r>
+            <a:r>
+              <a:rPr sz="1600" b="0" i="0">
+                <a:solidFill>
+                  <a:srgbClr val="2B2B2B"/>
+                </a:solidFill>
+                <a:latin typeface="Calibri"/>
+              </a:rPr>
+              <a:t> dan sí: una sola historia, APA estable, instrumentos claramente propuestos.</a:t>
             </a:r>
           </a:p>
           <a:p>
@@ -7098,7 +7017,7 @@
                 </a:solidFill>
                 <a:latin typeface="Calibri"/>
               </a:rPr>
-              <a:t>–   </a:t>
+              <a:t>–   Las </a:t>
             </a:r>
             <a:r>
               <a:rPr sz="1600" b="1" i="0">
@@ -7107,7 +7026,7 @@
                 </a:solidFill>
                 <a:latin typeface="Calibri"/>
               </a:rPr>
-              <a:t>Acompañamiento:</a:t>
+              <a:t>ocho secciones</a:t>
             </a:r>
             <a:r>
               <a:rPr sz="1600" b="0" i="0">
@@ -7116,41 +7035,7 @@
                 </a:solidFill>
                 <a:latin typeface="Calibri"/>
               </a:rPr>
-              <a:t> las tutorías por equipo se acuerdan durante la semana con el Docente; no hay atención sin cita previa.</a:t>
-            </a:r>
-          </a:p>
-          <a:p>
-            <a:pPr lvl="1">
-              <a:spcAft>
-                <a:spcPts val="600"/>
-              </a:spcAft>
-            </a:pPr>
-            <a:r>
-              <a:rPr sz="1500" b="0" i="0">
-                <a:solidFill>
-                  <a:srgbClr val="2B2B2B"/>
-                </a:solidFill>
-                <a:latin typeface="Calibri"/>
-              </a:rPr>
-              <a:t>●   La tutoría de este encuentro es de </a:t>
-            </a:r>
-            <a:r>
-              <a:rPr sz="1500" b="1" i="0">
-                <a:solidFill>
-                  <a:srgbClr val="2B2B2B"/>
-                </a:solidFill>
-                <a:latin typeface="Calibri"/>
-              </a:rPr>
-              <a:t>pulido final</a:t>
-            </a:r>
-            <a:r>
-              <a:rPr sz="1500" b="0" i="0">
-                <a:solidFill>
-                  <a:srgbClr val="2B2B2B"/>
-                </a:solidFill>
-                <a:latin typeface="Calibri"/>
-              </a:rPr>
-              <a:t>: traiga el documento abierto y las dudas concretas.</a:t>
+              <a:t> del checklist están presentes y las puedo ubicar por página.</a:t>
             </a:r>
           </a:p>
           <a:p>
@@ -7166,7 +7051,7 @@
                 </a:solidFill>
                 <a:latin typeface="Calibri"/>
               </a:rPr>
-              <a:t>–   Cierre del curso: sale con un anteproyecto </a:t>
+              <a:t>–   La </a:t>
             </a:r>
             <a:r>
               <a:rPr sz="1600" b="1" i="0">
@@ -7175,7 +7060,7 @@
                 </a:solidFill>
                 <a:latin typeface="Calibri"/>
               </a:rPr>
-              <a:t>completo, coherente y viable</a:t>
+              <a:t>prueba del hilo</a:t>
             </a:r>
             <a:r>
               <a:rPr sz="1600" b="0" i="0">
@@ -7184,7 +7069,7 @@
                 </a:solidFill>
                 <a:latin typeface="Calibri"/>
               </a:rPr>
-              <a:t>, listo para ejecutarse en Proyecto II una vez tenga el aval.</a:t>
+              <a:t> en seis frases se lee sin que yo tenga que explicar nada por fuera del texto.</a:t>
             </a:r>
           </a:p>
           <a:p>
@@ -7200,7 +7085,213 @@
                 </a:solidFill>
                 <a:latin typeface="Calibri"/>
               </a:rPr>
-              <a:t>–   Gracias por el trabajo sostenido de todo el periodo. Nos vemos en las tutorías de cierre.</a:t>
+              <a:t>–   Apliqué al menos </a:t>
+            </a:r>
+            <a:r>
+              <a:rPr sz="1600" b="1" i="0">
+                <a:solidFill>
+                  <a:srgbClr val="2B2B2B"/>
+                </a:solidFill>
+                <a:latin typeface="Calibri"/>
+              </a:rPr>
+              <a:t>tres mejoras</a:t>
+            </a:r>
+            <a:r>
+              <a:rPr sz="1600" b="0" i="0">
+                <a:solidFill>
+                  <a:srgbClr val="2B2B2B"/>
+                </a:solidFill>
+                <a:latin typeface="Calibri"/>
+              </a:rPr>
+              <a:t> surgidas de la lectura de mis pares.</a:t>
+            </a:r>
+          </a:p>
+          <a:p>
+            <a:pPr>
+              <a:spcAft>
+                <a:spcPts val="1000"/>
+              </a:spcAft>
+            </a:pPr>
+            <a:r>
+              <a:rPr sz="1600" b="0" i="0">
+                <a:solidFill>
+                  <a:srgbClr val="2B2B2B"/>
+                </a:solidFill>
+                <a:latin typeface="Calibri"/>
+              </a:rPr>
+              <a:t>–   Todos los verbos del método y del instrumento están en </a:t>
+            </a:r>
+            <a:r>
+              <a:rPr sz="1600" b="1" i="0">
+                <a:solidFill>
+                  <a:srgbClr val="2B2B2B"/>
+                </a:solidFill>
+                <a:latin typeface="Calibri"/>
+              </a:rPr>
+              <a:t>condicional o futuro</a:t>
+            </a:r>
+            <a:r>
+              <a:rPr sz="1600" b="0" i="0">
+                <a:solidFill>
+                  <a:srgbClr val="2B2B2B"/>
+                </a:solidFill>
+                <a:latin typeface="Calibri"/>
+              </a:rPr>
+              <a:t>.</a:t>
+            </a:r>
+          </a:p>
+          <a:p>
+            <a:pPr>
+              <a:spcAft>
+                <a:spcPts val="1000"/>
+              </a:spcAft>
+            </a:pPr>
+            <a:r>
+              <a:rPr sz="1600" b="0" i="0">
+                <a:solidFill>
+                  <a:srgbClr val="2B2B2B"/>
+                </a:solidFill>
+                <a:latin typeface="Calibri"/>
+              </a:rPr>
+              <a:t>–   El documento está en </a:t>
+            </a:r>
+            <a:r>
+              <a:rPr sz="1600" b="1" i="0">
+                <a:solidFill>
+                  <a:srgbClr val="2B2B2B"/>
+                </a:solidFill>
+                <a:latin typeface="Calibri"/>
+              </a:rPr>
+              <a:t>un solo archivo</a:t>
+            </a:r>
+            <a:r>
+              <a:rPr sz="1600" b="0" i="0">
+                <a:solidFill>
+                  <a:srgbClr val="2B2B2B"/>
+                </a:solidFill>
+                <a:latin typeface="Calibri"/>
+              </a:rPr>
+              <a:t>, con índice automático, formato y voz unificados.</a:t>
+            </a:r>
+          </a:p>
+          <a:p>
+            <a:pPr>
+              <a:spcAft>
+                <a:spcPts val="1000"/>
+              </a:spcAft>
+            </a:pPr>
+            <a:r>
+              <a:rPr sz="1600" b="0" i="0">
+                <a:solidFill>
+                  <a:srgbClr val="2B2B2B"/>
+                </a:solidFill>
+                <a:latin typeface="Calibri"/>
+              </a:rPr>
+              <a:t>–   Las </a:t>
+            </a:r>
+            <a:r>
+              <a:rPr sz="1600" b="1" i="0">
+                <a:solidFill>
+                  <a:srgbClr val="2B2B2B"/>
+                </a:solidFill>
+                <a:latin typeface="Calibri"/>
+              </a:rPr>
+              <a:t>correcciones de todos los avances anteriores</a:t>
+            </a:r>
+            <a:r>
+              <a:rPr sz="1600" b="0" i="0">
+                <a:solidFill>
+                  <a:srgbClr val="2B2B2B"/>
+                </a:solidFill>
+                <a:latin typeface="Calibri"/>
+              </a:rPr>
+              <a:t> están efectivamente incorporadas.</a:t>
+            </a:r>
+          </a:p>
+          <a:p>
+            <a:pPr>
+              <a:spcAft>
+                <a:spcPts val="1000"/>
+              </a:spcAft>
+            </a:pPr>
+            <a:r>
+              <a:rPr sz="1600" b="0" i="0">
+                <a:solidFill>
+                  <a:srgbClr val="2B2B2B"/>
+                </a:solidFill>
+                <a:latin typeface="Calibri"/>
+              </a:rPr>
+              <a:t>–   Cerré el documento con el párrafo de </a:t>
+            </a:r>
+            <a:r>
+              <a:rPr sz="1600" b="1" i="0">
+                <a:solidFill>
+                  <a:srgbClr val="2B2B2B"/>
+                </a:solidFill>
+                <a:latin typeface="Calibri"/>
+              </a:rPr>
+              <a:t>alcance de Proyecto I y puente a Proyecto II</a:t>
+            </a:r>
+            <a:r>
+              <a:rPr sz="1600" b="0" i="0">
+                <a:solidFill>
+                  <a:srgbClr val="2B2B2B"/>
+                </a:solidFill>
+                <a:latin typeface="Calibri"/>
+              </a:rPr>
+              <a:t>.</a:t>
+            </a:r>
+          </a:p>
+          <a:p>
+            <a:pPr>
+              <a:spcAft>
+                <a:spcPts val="1000"/>
+              </a:spcAft>
+            </a:pPr>
+            <a:r>
+              <a:rPr sz="1600" b="0" i="0">
+                <a:solidFill>
+                  <a:srgbClr val="2B2B2B"/>
+                </a:solidFill>
+                <a:latin typeface="Calibri"/>
+              </a:rPr>
+              <a:t>–   Diligencié la </a:t>
+            </a:r>
+            <a:r>
+              <a:rPr sz="1600" b="1" i="0">
+                <a:solidFill>
+                  <a:srgbClr val="2B2B2B"/>
+                </a:solidFill>
+                <a:latin typeface="Calibri"/>
+              </a:rPr>
+              <a:t>coevaluación</a:t>
+            </a:r>
+            <a:r>
+              <a:rPr sz="1600" b="0" i="0">
+                <a:solidFill>
+                  <a:srgbClr val="2B2B2B"/>
+                </a:solidFill>
+                <a:latin typeface="Calibri"/>
+              </a:rPr>
+              <a:t> y la </a:t>
+            </a:r>
+            <a:r>
+              <a:rPr sz="1600" b="1" i="0">
+                <a:solidFill>
+                  <a:srgbClr val="2B2B2B"/>
+                </a:solidFill>
+                <a:latin typeface="Calibri"/>
+              </a:rPr>
+              <a:t>autoevaluación</a:t>
+            </a:r>
+            <a:r>
+              <a:rPr sz="1600" b="0" i="0">
+                <a:solidFill>
+                  <a:srgbClr val="2B2B2B"/>
+                </a:solidFill>
+                <a:latin typeface="Calibri"/>
+              </a:rPr>
+              <a:t> en CDigital, cada una en su ventana.</a:t>
             </a:r>
           </a:p>
         </p:txBody>
@@ -7249,6 +7340,1750 @@
 </file>
 
 <file path=ppt/slides/slide19.xml><?xml version="1.0" encoding="utf-8"?>
+<p:sld xmlns:a="http://schemas.openxmlformats.org/drawingml/2006/main" xmlns:p="http://schemas.openxmlformats.org/presentationml/2006/main" xmlns:r="http://schemas.openxmlformats.org/officeDocument/2006/relationships">
+  <p:cSld>
+    <p:bg>
+      <p:bgPr>
+        <a:solidFill>
+          <a:srgbClr val="FFFFFF"/>
+        </a:solidFill>
+        <a:effectLst/>
+      </p:bgPr>
+    </p:bg>
+    <p:spTree>
+      <p:nvGrpSpPr>
+        <p:cNvPr id="1" name=""/>
+        <p:cNvGrpSpPr/>
+        <p:nvPr/>
+      </p:nvGrpSpPr>
+      <p:grpSpPr/>
+      <p:sp>
+        <p:nvSpPr>
+          <p:cNvPr id="2" name="Rectangle 1"/>
+          <p:cNvSpPr/>
+          <p:nvPr/>
+        </p:nvSpPr>
+        <p:spPr>
+          <a:xfrm>
+            <a:off x="0" y="0"/>
+            <a:ext cx="12191695" cy="1188720"/>
+          </a:xfrm>
+          <a:prstGeom prst="rect">
+            <a:avLst/>
+          </a:prstGeom>
+          <a:solidFill>
+            <a:srgbClr val="0C2340"/>
+          </a:solidFill>
+          <a:ln>
+            <a:noFill/>
+          </a:ln>
+          <a:effectLst/>
+        </p:spPr>
+        <p:style>
+          <a:lnRef idx="1">
+            <a:schemeClr val="accent1"/>
+          </a:lnRef>
+          <a:fillRef idx="3">
+            <a:schemeClr val="accent1"/>
+          </a:fillRef>
+          <a:effectRef idx="2">
+            <a:schemeClr val="accent1"/>
+          </a:effectRef>
+          <a:fontRef idx="minor">
+            <a:schemeClr val="lt1"/>
+          </a:fontRef>
+        </p:style>
+        <p:txBody>
+          <a:bodyPr rtlCol="0" anchor="ctr"/>
+          <a:lstStyle/>
+          <a:p>
+            <a:pPr algn="ctr"/>
+          </a:p>
+        </p:txBody>
+      </p:sp>
+      <p:sp>
+        <p:nvSpPr>
+          <p:cNvPr id="3" name="TextBox 2"/>
+          <p:cNvSpPr txBox="1"/>
+          <p:nvPr/>
+        </p:nvSpPr>
+        <p:spPr>
+          <a:xfrm>
+            <a:off x="640080" y="0"/>
+            <a:ext cx="9082735" cy="1188720"/>
+          </a:xfrm>
+          <a:prstGeom prst="rect">
+            <a:avLst/>
+          </a:prstGeom>
+          <a:noFill/>
+        </p:spPr>
+        <p:txBody>
+          <a:bodyPr wrap="square" anchor="ctr" lIns="0" rIns="0" tIns="0" bIns="0">
+            <a:spAutoFit/>
+          </a:bodyPr>
+          <a:lstStyle/>
+          <a:p>
+            <a:pPr algn="ctr"/>
+            <a:r>
+              <a:rPr sz="2600" b="1" i="0">
+                <a:solidFill>
+                  <a:srgbClr val="FFFFFF"/>
+                </a:solidFill>
+                <a:latin typeface="Calibri"/>
+              </a:rPr>
+              <a:t>Trabajo autónomo y cierre del ciclo sincrónico</a:t>
+            </a:r>
+          </a:p>
+        </p:txBody>
+      </p:sp>
+      <p:sp>
+        <p:nvSpPr>
+          <p:cNvPr id="4" name="TextBox 3"/>
+          <p:cNvSpPr txBox="1"/>
+          <p:nvPr/>
+        </p:nvSpPr>
+        <p:spPr>
+          <a:xfrm>
+            <a:off x="640080" y="1691639"/>
+            <a:ext cx="10911535" cy="4617720"/>
+          </a:xfrm>
+          <a:prstGeom prst="rect">
+            <a:avLst/>
+          </a:prstGeom>
+          <a:noFill/>
+        </p:spPr>
+        <p:txBody>
+          <a:bodyPr wrap="square" anchor="t" lIns="0" rIns="0" tIns="0" bIns="0">
+            <a:spAutoFit/>
+          </a:bodyPr>
+          <a:lstStyle/>
+          <a:p>
+            <a:pPr>
+              <a:spcAft>
+                <a:spcPts val="1000"/>
+              </a:spcAft>
+            </a:pPr>
+            <a:r>
+              <a:rPr sz="1600" b="0" i="0">
+                <a:solidFill>
+                  <a:srgbClr val="2B2B2B"/>
+                </a:solidFill>
+                <a:latin typeface="Calibri"/>
+              </a:rPr>
+              <a:t>–   </a:t>
+            </a:r>
+            <a:r>
+              <a:rPr sz="1600" b="1" i="0">
+                <a:solidFill>
+                  <a:srgbClr val="2B2B2B"/>
+                </a:solidFill>
+                <a:latin typeface="Calibri"/>
+              </a:rPr>
+              <a:t>Autónomo hasta el cierre del curso:</a:t>
+            </a:r>
+          </a:p>
+          <a:p>
+            <a:pPr lvl="1">
+              <a:spcAft>
+                <a:spcPts val="600"/>
+              </a:spcAft>
+            </a:pPr>
+            <a:r>
+              <a:rPr sz="1500" b="0" i="0">
+                <a:solidFill>
+                  <a:srgbClr val="2B2B2B"/>
+                </a:solidFill>
+                <a:latin typeface="Calibri"/>
+              </a:rPr>
+              <a:t>●   Pulido final del anteproyecto: aplique los pendientes que anotó hoy, en orden de impacto.</a:t>
+            </a:r>
+          </a:p>
+          <a:p>
+            <a:pPr lvl="1">
+              <a:spcAft>
+                <a:spcPts val="600"/>
+              </a:spcAft>
+            </a:pPr>
+            <a:r>
+              <a:rPr sz="1500" b="0" i="0">
+                <a:solidFill>
+                  <a:srgbClr val="2B2B2B"/>
+                </a:solidFill>
+                <a:latin typeface="Calibri"/>
+              </a:rPr>
+              <a:t>●   Lectura final de corrido, en voz alta, con el checklist de las ocho secciones al lado.</a:t>
+            </a:r>
+          </a:p>
+          <a:p>
+            <a:pPr lvl="1">
+              <a:spcAft>
+                <a:spcPts val="600"/>
+              </a:spcAft>
+            </a:pPr>
+            <a:r>
+              <a:rPr sz="1500" b="0" i="0">
+                <a:solidFill>
+                  <a:srgbClr val="2B2B2B"/>
+                </a:solidFill>
+                <a:latin typeface="Calibri"/>
+              </a:rPr>
+              <a:t>●   Última verificación cruzada de referencias </a:t>
+            </a:r>
+            <a:r>
+              <a:rPr sz="1500" b="1" i="0">
+                <a:solidFill>
+                  <a:srgbClr val="2B2B2B"/>
+                </a:solidFill>
+                <a:latin typeface="Calibri"/>
+              </a:rPr>
+              <a:t>después</a:t>
+            </a:r>
+            <a:r>
+              <a:rPr sz="1500" b="0" i="0">
+                <a:solidFill>
+                  <a:srgbClr val="2B2B2B"/>
+                </a:solidFill>
+                <a:latin typeface="Calibri"/>
+              </a:rPr>
+              <a:t> de la edición final.</a:t>
+            </a:r>
+          </a:p>
+          <a:p>
+            <a:pPr lvl="1">
+              <a:spcAft>
+                <a:spcPts val="600"/>
+              </a:spcAft>
+            </a:pPr>
+            <a:r>
+              <a:rPr sz="1500" b="0" i="0">
+                <a:solidFill>
+                  <a:srgbClr val="2B2B2B"/>
+                </a:solidFill>
+                <a:latin typeface="Calibri"/>
+              </a:rPr>
+              <a:t>●   Diligencie en </a:t>
+            </a:r>
+            <a:r>
+              <a:rPr sz="1500" b="1" i="0">
+                <a:solidFill>
+                  <a:srgbClr val="2B2B2B"/>
+                </a:solidFill>
+                <a:latin typeface="Calibri"/>
+              </a:rPr>
+              <a:t>CDigital</a:t>
+            </a:r>
+            <a:r>
+              <a:rPr sz="1500" b="0" i="0">
+                <a:solidFill>
+                  <a:srgbClr val="2B2B2B"/>
+                </a:solidFill>
+                <a:latin typeface="Calibri"/>
+              </a:rPr>
+              <a:t> la coevaluación y la autoevaluación, cada una en su ventana. Son individuales.</a:t>
+            </a:r>
+          </a:p>
+          <a:p>
+            <a:pPr>
+              <a:spcAft>
+                <a:spcPts val="1000"/>
+              </a:spcAft>
+            </a:pPr>
+            <a:r>
+              <a:rPr sz="1600" b="0" i="0">
+                <a:solidFill>
+                  <a:srgbClr val="2B2B2B"/>
+                </a:solidFill>
+                <a:latin typeface="Calibri"/>
+              </a:rPr>
+              <a:t>–   </a:t>
+            </a:r>
+            <a:r>
+              <a:rPr sz="1600" b="1" i="0">
+                <a:solidFill>
+                  <a:srgbClr val="2B2B2B"/>
+                </a:solidFill>
+                <a:latin typeface="Calibri"/>
+              </a:rPr>
+              <a:t>Acompañamiento:</a:t>
+            </a:r>
+            <a:r>
+              <a:rPr sz="1600" b="0" i="0">
+                <a:solidFill>
+                  <a:srgbClr val="2B2B2B"/>
+                </a:solidFill>
+                <a:latin typeface="Calibri"/>
+              </a:rPr>
+              <a:t> las tutorías por equipo se acuerdan durante la semana con el Docente; no hay atención sin cita previa.</a:t>
+            </a:r>
+          </a:p>
+          <a:p>
+            <a:pPr lvl="1">
+              <a:spcAft>
+                <a:spcPts val="600"/>
+              </a:spcAft>
+            </a:pPr>
+            <a:r>
+              <a:rPr sz="1500" b="0" i="0">
+                <a:solidFill>
+                  <a:srgbClr val="2B2B2B"/>
+                </a:solidFill>
+                <a:latin typeface="Calibri"/>
+              </a:rPr>
+              <a:t>●   La tutoría de este encuentro es de </a:t>
+            </a:r>
+            <a:r>
+              <a:rPr sz="1500" b="1" i="0">
+                <a:solidFill>
+                  <a:srgbClr val="2B2B2B"/>
+                </a:solidFill>
+                <a:latin typeface="Calibri"/>
+              </a:rPr>
+              <a:t>pulido final</a:t>
+            </a:r>
+            <a:r>
+              <a:rPr sz="1500" b="0" i="0">
+                <a:solidFill>
+                  <a:srgbClr val="2B2B2B"/>
+                </a:solidFill>
+                <a:latin typeface="Calibri"/>
+              </a:rPr>
+              <a:t>: traiga el documento abierto y las dudas concretas.</a:t>
+            </a:r>
+          </a:p>
+          <a:p>
+            <a:pPr>
+              <a:spcAft>
+                <a:spcPts val="1000"/>
+              </a:spcAft>
+            </a:pPr>
+            <a:r>
+              <a:rPr sz="1600" b="0" i="0">
+                <a:solidFill>
+                  <a:srgbClr val="2B2B2B"/>
+                </a:solidFill>
+                <a:latin typeface="Calibri"/>
+              </a:rPr>
+              <a:t>–   Cierre del curso: sale con un anteproyecto </a:t>
+            </a:r>
+            <a:r>
+              <a:rPr sz="1600" b="1" i="0">
+                <a:solidFill>
+                  <a:srgbClr val="2B2B2B"/>
+                </a:solidFill>
+                <a:latin typeface="Calibri"/>
+              </a:rPr>
+              <a:t>completo, coherente y viable</a:t>
+            </a:r>
+            <a:r>
+              <a:rPr sz="1600" b="0" i="0">
+                <a:solidFill>
+                  <a:srgbClr val="2B2B2B"/>
+                </a:solidFill>
+                <a:latin typeface="Calibri"/>
+              </a:rPr>
+              <a:t>, listo para ejecutarse en Proyecto II una vez tenga el aval.</a:t>
+            </a:r>
+          </a:p>
+          <a:p>
+            <a:pPr>
+              <a:spcAft>
+                <a:spcPts val="1000"/>
+              </a:spcAft>
+            </a:pPr>
+            <a:r>
+              <a:rPr sz="1600" b="0" i="0">
+                <a:solidFill>
+                  <a:srgbClr val="2B2B2B"/>
+                </a:solidFill>
+                <a:latin typeface="Calibri"/>
+              </a:rPr>
+              <a:t>–   Gracias por el trabajo sostenido de todo el periodo. Nos vemos en las tutorías de cierre.</a:t>
+            </a:r>
+          </a:p>
+        </p:txBody>
+      </p:sp>
+      <p:sp>
+        <p:nvSpPr>
+          <p:cNvPr id="5" name="TextBox 4"/>
+          <p:cNvSpPr txBox="1"/>
+          <p:nvPr/>
+        </p:nvSpPr>
+        <p:spPr>
+          <a:xfrm>
+            <a:off x="11094415" y="6446520"/>
+            <a:ext cx="548640" cy="274320"/>
+          </a:xfrm>
+          <a:prstGeom prst="rect">
+            <a:avLst/>
+          </a:prstGeom>
+          <a:noFill/>
+        </p:spPr>
+        <p:txBody>
+          <a:bodyPr wrap="square" anchor="t" lIns="0" rIns="0" tIns="0" bIns="0">
+            <a:spAutoFit/>
+          </a:bodyPr>
+          <a:lstStyle/>
+          <a:p>
+            <a:pPr algn="r"/>
+            <a:r>
+              <a:rPr sz="1000" b="1" i="0">
+                <a:solidFill>
+                  <a:srgbClr val="8F989D"/>
+                </a:solidFill>
+                <a:latin typeface="Calibri"/>
+              </a:rPr>
+              <a:t>19</a:t>
+            </a:r>
+          </a:p>
+        </p:txBody>
+      </p:sp>
+    </p:spTree>
+  </p:cSld>
+  <p:clrMapOvr>
+    <a:masterClrMapping/>
+  </p:clrMapOvr>
+</p:sld>
+</file>
+
+<file path=ppt/slides/slide2.xml><?xml version="1.0" encoding="utf-8"?>
+<p:sld xmlns:a="http://schemas.openxmlformats.org/drawingml/2006/main" xmlns:p="http://schemas.openxmlformats.org/presentationml/2006/main" xmlns:r="http://schemas.openxmlformats.org/officeDocument/2006/relationships">
+  <p:cSld>
+    <p:bg>
+      <p:bgPr>
+        <a:solidFill>
+          <a:srgbClr val="FFFFFF"/>
+        </a:solidFill>
+        <a:effectLst/>
+      </p:bgPr>
+    </p:bg>
+    <p:spTree>
+      <p:nvGrpSpPr>
+        <p:cNvPr id="1" name=""/>
+        <p:cNvGrpSpPr/>
+        <p:nvPr/>
+      </p:nvGrpSpPr>
+      <p:grpSpPr/>
+      <p:sp>
+        <p:nvSpPr>
+          <p:cNvPr id="2" name="Rectangle 1"/>
+          <p:cNvSpPr/>
+          <p:nvPr/>
+        </p:nvSpPr>
+        <p:spPr>
+          <a:xfrm>
+            <a:off x="0" y="0"/>
+            <a:ext cx="12191695" cy="1188720"/>
+          </a:xfrm>
+          <a:prstGeom prst="rect">
+            <a:avLst/>
+          </a:prstGeom>
+          <a:solidFill>
+            <a:srgbClr val="0C2340"/>
+          </a:solidFill>
+          <a:ln>
+            <a:noFill/>
+          </a:ln>
+          <a:effectLst/>
+        </p:spPr>
+        <p:style>
+          <a:lnRef idx="1">
+            <a:schemeClr val="accent1"/>
+          </a:lnRef>
+          <a:fillRef idx="3">
+            <a:schemeClr val="accent1"/>
+          </a:fillRef>
+          <a:effectRef idx="2">
+            <a:schemeClr val="accent1"/>
+          </a:effectRef>
+          <a:fontRef idx="minor">
+            <a:schemeClr val="lt1"/>
+          </a:fontRef>
+        </p:style>
+        <p:txBody>
+          <a:bodyPr rtlCol="0" anchor="ctr"/>
+          <a:lstStyle/>
+          <a:p>
+            <a:pPr algn="ctr"/>
+          </a:p>
+        </p:txBody>
+      </p:sp>
+      <p:sp>
+        <p:nvSpPr>
+          <p:cNvPr id="3" name="TextBox 2"/>
+          <p:cNvSpPr txBox="1"/>
+          <p:nvPr/>
+        </p:nvSpPr>
+        <p:spPr>
+          <a:xfrm>
+            <a:off x="640080" y="0"/>
+            <a:ext cx="9082735" cy="1188720"/>
+          </a:xfrm>
+          <a:prstGeom prst="rect">
+            <a:avLst/>
+          </a:prstGeom>
+          <a:noFill/>
+        </p:spPr>
+        <p:txBody>
+          <a:bodyPr wrap="square" anchor="ctr" lIns="0" rIns="0" tIns="0" bIns="0">
+            <a:spAutoFit/>
+          </a:bodyPr>
+          <a:lstStyle/>
+          <a:p>
+            <a:pPr algn="ctr"/>
+            <a:r>
+              <a:rPr sz="2600" b="1" i="0">
+                <a:solidFill>
+                  <a:srgbClr val="FFFFFF"/>
+                </a:solidFill>
+                <a:latin typeface="Calibri"/>
+              </a:rPr>
+              <a:t>Su anteproyecto se va a leer de corrido: ¿historia o collage?</a:t>
+            </a:r>
+          </a:p>
+        </p:txBody>
+      </p:sp>
+      <p:sp>
+        <p:nvSpPr>
+          <p:cNvPr id="4" name="TextBox 3"/>
+          <p:cNvSpPr txBox="1"/>
+          <p:nvPr/>
+        </p:nvSpPr>
+        <p:spPr>
+          <a:xfrm>
+            <a:off x="640080" y="1691639"/>
+            <a:ext cx="10911535" cy="4617720"/>
+          </a:xfrm>
+          <a:prstGeom prst="rect">
+            <a:avLst/>
+          </a:prstGeom>
+          <a:noFill/>
+        </p:spPr>
+        <p:txBody>
+          <a:bodyPr wrap="square" anchor="t" lIns="0" rIns="0" tIns="0" bIns="0">
+            <a:spAutoFit/>
+          </a:bodyPr>
+          <a:lstStyle/>
+          <a:p>
+            <a:pPr>
+              <a:spcAft>
+                <a:spcPts val="1000"/>
+              </a:spcAft>
+            </a:pPr>
+            <a:r>
+              <a:rPr sz="1600" b="0" i="0">
+                <a:solidFill>
+                  <a:srgbClr val="2B2B2B"/>
+                </a:solidFill>
+                <a:latin typeface="Calibri"/>
+              </a:rPr>
+              <a:t>–   Quien evalúa su anteproyecto </a:t>
+            </a:r>
+            <a:r>
+              <a:rPr sz="1600" b="1" i="0">
+                <a:solidFill>
+                  <a:srgbClr val="2B2B2B"/>
+                </a:solidFill>
+                <a:latin typeface="Calibri"/>
+              </a:rPr>
+              <a:t>no lo lee por capítulos sueltos</a:t>
+            </a:r>
+            <a:r>
+              <a:rPr sz="1600" b="0" i="0">
+                <a:solidFill>
+                  <a:srgbClr val="2B2B2B"/>
+                </a:solidFill>
+                <a:latin typeface="Calibri"/>
+              </a:rPr>
+              <a:t>: lo lee de principio a fin, seguido.</a:t>
+            </a:r>
+          </a:p>
+          <a:p>
+            <a:pPr lvl="1">
+              <a:spcAft>
+                <a:spcPts val="600"/>
+              </a:spcAft>
+            </a:pPr>
+            <a:r>
+              <a:rPr sz="1500" b="0" i="0">
+                <a:solidFill>
+                  <a:srgbClr val="2B2B2B"/>
+                </a:solidFill>
+                <a:latin typeface="Calibri"/>
+              </a:rPr>
+              <a:t>●   Y en esa lectura corrida se nota, en dos minutos, si el documento es </a:t>
+            </a:r>
+            <a:r>
+              <a:rPr sz="1500" b="1" i="0">
+                <a:solidFill>
+                  <a:srgbClr val="2B2B2B"/>
+                </a:solidFill>
+                <a:latin typeface="Calibri"/>
+              </a:rPr>
+              <a:t>una historia</a:t>
+            </a:r>
+            <a:r>
+              <a:rPr sz="1500" b="0" i="0">
+                <a:solidFill>
+                  <a:srgbClr val="2B2B2B"/>
+                </a:solidFill>
+                <a:latin typeface="Calibri"/>
+              </a:rPr>
+              <a:t> o </a:t>
+            </a:r>
+            <a:r>
+              <a:rPr sz="1500" b="1" i="0">
+                <a:solidFill>
+                  <a:srgbClr val="2B2B2B"/>
+                </a:solidFill>
+                <a:latin typeface="Calibri"/>
+              </a:rPr>
+              <a:t>un collage de tareas</a:t>
+            </a:r>
+            <a:r>
+              <a:rPr sz="1500" b="0" i="0">
+                <a:solidFill>
+                  <a:srgbClr val="2B2B2B"/>
+                </a:solidFill>
+                <a:latin typeface="Calibri"/>
+              </a:rPr>
+              <a:t>.</a:t>
+            </a:r>
+          </a:p>
+          <a:p>
+            <a:pPr>
+              <a:spcAft>
+                <a:spcPts val="1000"/>
+              </a:spcAft>
+            </a:pPr>
+            <a:r>
+              <a:rPr sz="1600" b="0" i="0">
+                <a:solidFill>
+                  <a:srgbClr val="2B2B2B"/>
+                </a:solidFill>
+                <a:latin typeface="Calibri"/>
+              </a:rPr>
+              <a:t>–   Collage: el capítulo 1 promete una cosa, el método hace otra y el cronograma no menciona ninguna de las dos.</a:t>
+            </a:r>
+          </a:p>
+          <a:p>
+            <a:pPr>
+              <a:spcAft>
+                <a:spcPts val="1000"/>
+              </a:spcAft>
+            </a:pPr>
+            <a:r>
+              <a:rPr sz="1600" b="0" i="0">
+                <a:solidFill>
+                  <a:srgbClr val="2B2B2B"/>
+                </a:solidFill>
+                <a:latin typeface="Calibri"/>
+              </a:rPr>
+              <a:t>–   Historia: cada sección </a:t>
+            </a:r>
+            <a:r>
+              <a:rPr sz="1600" b="1" i="0">
+                <a:solidFill>
+                  <a:srgbClr val="2B2B2B"/>
+                </a:solidFill>
+                <a:latin typeface="Calibri"/>
+              </a:rPr>
+              <a:t>recoge</a:t>
+            </a:r>
+            <a:r>
+              <a:rPr sz="1600" b="0" i="0">
+                <a:solidFill>
+                  <a:srgbClr val="2B2B2B"/>
+                </a:solidFill>
+                <a:latin typeface="Calibri"/>
+              </a:rPr>
+              <a:t> lo que dijo la anterior y </a:t>
+            </a:r>
+            <a:r>
+              <a:rPr sz="1600" b="1" i="0">
+                <a:solidFill>
+                  <a:srgbClr val="2B2B2B"/>
+                </a:solidFill>
+                <a:latin typeface="Calibri"/>
+              </a:rPr>
+              <a:t>prepara</a:t>
+            </a:r>
+            <a:r>
+              <a:rPr sz="1600" b="0" i="0">
+                <a:solidFill>
+                  <a:srgbClr val="2B2B2B"/>
+                </a:solidFill>
+                <a:latin typeface="Calibri"/>
+              </a:rPr>
+              <a:t> la siguiente. No hay saltos ni sorpresas.</a:t>
+            </a:r>
+          </a:p>
+          <a:p>
+            <a:pPr>
+              <a:spcAft>
+                <a:spcPts val="1000"/>
+              </a:spcAft>
+            </a:pPr>
+            <a:r>
+              <a:rPr sz="1600" b="0" i="0">
+                <a:solidFill>
+                  <a:srgbClr val="2B2B2B"/>
+                </a:solidFill>
+                <a:latin typeface="Calibri"/>
+              </a:rPr>
+              <a:t>–   Hoy, en la última sesión de contenido, hacemos tres cosas concretas:</a:t>
+            </a:r>
+          </a:p>
+          <a:p>
+            <a:pPr lvl="1">
+              <a:spcAft>
+                <a:spcPts val="600"/>
+              </a:spcAft>
+            </a:pPr>
+            <a:r>
+              <a:rPr sz="1500" b="0" i="0">
+                <a:solidFill>
+                  <a:srgbClr val="2B2B2B"/>
+                </a:solidFill>
+                <a:latin typeface="Calibri"/>
+              </a:rPr>
+              <a:t>●   </a:t>
+            </a:r>
+            <a:r>
+              <a:rPr sz="1500" b="1" i="0">
+                <a:solidFill>
+                  <a:srgbClr val="2B2B2B"/>
+                </a:solidFill>
+                <a:latin typeface="Calibri"/>
+              </a:rPr>
+              <a:t>Verificar</a:t>
+            </a:r>
+            <a:r>
+              <a:rPr sz="1500" b="0" i="0">
+                <a:solidFill>
+                  <a:srgbClr val="2B2B2B"/>
+                </a:solidFill>
+                <a:latin typeface="Calibri"/>
+              </a:rPr>
+              <a:t> la integración final con un checklist en mano, sección por sección.</a:t>
+            </a:r>
+          </a:p>
+          <a:p>
+            <a:pPr lvl="1">
+              <a:spcAft>
+                <a:spcPts val="600"/>
+              </a:spcAft>
+            </a:pPr>
+            <a:r>
+              <a:rPr sz="1500" b="0" i="0">
+                <a:solidFill>
+                  <a:srgbClr val="2B2B2B"/>
+                </a:solidFill>
+                <a:latin typeface="Calibri"/>
+              </a:rPr>
+              <a:t>●   </a:t>
+            </a:r>
+            <a:r>
+              <a:rPr sz="1500" b="1" i="0">
+                <a:solidFill>
+                  <a:srgbClr val="2B2B2B"/>
+                </a:solidFill>
+                <a:latin typeface="Calibri"/>
+              </a:rPr>
+              <a:t>Entrenar el ojo crítico</a:t>
+            </a:r>
+            <a:r>
+              <a:rPr sz="1500" b="0" i="0">
+                <a:solidFill>
+                  <a:srgbClr val="2B2B2B"/>
+                </a:solidFill>
+                <a:latin typeface="Calibri"/>
+              </a:rPr>
+              <a:t> con una rúbrica de cuatro criterios, leyendo el trabajo de otro equipo.</a:t>
+            </a:r>
+          </a:p>
+          <a:p>
+            <a:pPr lvl="1">
+              <a:spcAft>
+                <a:spcPts val="600"/>
+              </a:spcAft>
+            </a:pPr>
+            <a:r>
+              <a:rPr sz="1500" b="0" i="0">
+                <a:solidFill>
+                  <a:srgbClr val="2B2B2B"/>
+                </a:solidFill>
+                <a:latin typeface="Calibri"/>
+              </a:rPr>
+              <a:t>●   </a:t>
+            </a:r>
+            <a:r>
+              <a:rPr sz="1500" b="1" i="0">
+                <a:solidFill>
+                  <a:srgbClr val="2B2B2B"/>
+                </a:solidFill>
+                <a:latin typeface="Calibri"/>
+              </a:rPr>
+              <a:t>Aplicar</a:t>
+            </a:r>
+            <a:r>
+              <a:rPr sz="1500" b="0" i="0">
+                <a:solidFill>
+                  <a:srgbClr val="2B2B2B"/>
+                </a:solidFill>
+                <a:latin typeface="Calibri"/>
+              </a:rPr>
+              <a:t> los ajustes que valgan la pena en su propio documento, hoy mismo.</a:t>
+            </a:r>
+          </a:p>
+          <a:p>
+            <a:pPr>
+              <a:spcAft>
+                <a:spcPts val="1000"/>
+              </a:spcAft>
+            </a:pPr>
+            <a:r>
+              <a:rPr sz="1600" b="0" i="0">
+                <a:solidFill>
+                  <a:srgbClr val="2B2B2B"/>
+                </a:solidFill>
+                <a:latin typeface="Calibri"/>
+              </a:rPr>
+              <a:t>–   Lo que se corrige hoy no se corrige nunca más: después de este encuentro, el trabajo es autónomo.</a:t>
+            </a:r>
+          </a:p>
+        </p:txBody>
+      </p:sp>
+      <p:sp>
+        <p:nvSpPr>
+          <p:cNvPr id="5" name="TextBox 4"/>
+          <p:cNvSpPr txBox="1"/>
+          <p:nvPr/>
+        </p:nvSpPr>
+        <p:spPr>
+          <a:xfrm>
+            <a:off x="11094415" y="6446520"/>
+            <a:ext cx="548640" cy="274320"/>
+          </a:xfrm>
+          <a:prstGeom prst="rect">
+            <a:avLst/>
+          </a:prstGeom>
+          <a:noFill/>
+        </p:spPr>
+        <p:txBody>
+          <a:bodyPr wrap="square" anchor="t" lIns="0" rIns="0" tIns="0" bIns="0">
+            <a:spAutoFit/>
+          </a:bodyPr>
+          <a:lstStyle/>
+          <a:p>
+            <a:pPr algn="r"/>
+            <a:r>
+              <a:rPr sz="1000" b="1" i="0">
+                <a:solidFill>
+                  <a:srgbClr val="8F989D"/>
+                </a:solidFill>
+                <a:latin typeface="Calibri"/>
+              </a:rPr>
+              <a:t>2</a:t>
+            </a:r>
+          </a:p>
+        </p:txBody>
+      </p:sp>
+    </p:spTree>
+  </p:cSld>
+  <p:clrMapOvr>
+    <a:masterClrMapping/>
+  </p:clrMapOvr>
+</p:sld>
+</file>
+
+<file path=ppt/slides/slide20.xml><?xml version="1.0" encoding="utf-8"?>
+<p:sld xmlns:a="http://schemas.openxmlformats.org/drawingml/2006/main" xmlns:p="http://schemas.openxmlformats.org/presentationml/2006/main" xmlns:r="http://schemas.openxmlformats.org/officeDocument/2006/relationships">
+  <p:cSld>
+    <p:bg>
+      <p:bgPr>
+        <a:solidFill>
+          <a:srgbClr val="FFFFFF"/>
+        </a:solidFill>
+        <a:effectLst/>
+      </p:bgPr>
+    </p:bg>
+    <p:spTree>
+      <p:nvGrpSpPr>
+        <p:cNvPr id="1" name=""/>
+        <p:cNvGrpSpPr/>
+        <p:nvPr/>
+      </p:nvGrpSpPr>
+      <p:grpSpPr/>
+      <p:sp>
+        <p:nvSpPr>
+          <p:cNvPr id="2" name="Rectangle 1"/>
+          <p:cNvSpPr/>
+          <p:nvPr/>
+        </p:nvSpPr>
+        <p:spPr>
+          <a:xfrm>
+            <a:off x="0" y="0"/>
+            <a:ext cx="12191695" cy="1188720"/>
+          </a:xfrm>
+          <a:prstGeom prst="rect">
+            <a:avLst/>
+          </a:prstGeom>
+          <a:solidFill>
+            <a:srgbClr val="0C2340"/>
+          </a:solidFill>
+          <a:ln>
+            <a:noFill/>
+          </a:ln>
+          <a:effectLst/>
+        </p:spPr>
+        <p:style>
+          <a:lnRef idx="1">
+            <a:schemeClr val="accent1"/>
+          </a:lnRef>
+          <a:fillRef idx="3">
+            <a:schemeClr val="accent1"/>
+          </a:fillRef>
+          <a:effectRef idx="2">
+            <a:schemeClr val="accent1"/>
+          </a:effectRef>
+          <a:fontRef idx="minor">
+            <a:schemeClr val="lt1"/>
+          </a:fontRef>
+        </p:style>
+        <p:txBody>
+          <a:bodyPr rtlCol="0" anchor="ctr"/>
+          <a:lstStyle/>
+          <a:p>
+            <a:pPr algn="ctr"/>
+          </a:p>
+        </p:txBody>
+      </p:sp>
+      <p:sp>
+        <p:nvSpPr>
+          <p:cNvPr id="3" name="TextBox 2"/>
+          <p:cNvSpPr txBox="1"/>
+          <p:nvPr/>
+        </p:nvSpPr>
+        <p:spPr>
+          <a:xfrm>
+            <a:off x="640080" y="0"/>
+            <a:ext cx="9082735" cy="1188720"/>
+          </a:xfrm>
+          <a:prstGeom prst="rect">
+            <a:avLst/>
+          </a:prstGeom>
+          <a:noFill/>
+        </p:spPr>
+        <p:txBody>
+          <a:bodyPr wrap="square" anchor="ctr" lIns="0" rIns="0" tIns="0" bIns="0">
+            <a:spAutoFit/>
+          </a:bodyPr>
+          <a:lstStyle/>
+          <a:p>
+            <a:pPr algn="ctr"/>
+            <a:r>
+              <a:rPr sz="2600" b="1" i="0">
+                <a:solidFill>
+                  <a:srgbClr val="FFFFFF"/>
+                </a:solidFill>
+                <a:latin typeface="Calibri"/>
+              </a:rPr>
+              <a:t>RUTA DE ENTREGABLES DEL CURSO</a:t>
+            </a:r>
+          </a:p>
+        </p:txBody>
+      </p:sp>
+      <p:sp>
+        <p:nvSpPr>
+          <p:cNvPr id="4" name="TextBox 3"/>
+          <p:cNvSpPr txBox="1"/>
+          <p:nvPr/>
+        </p:nvSpPr>
+        <p:spPr>
+          <a:xfrm>
+            <a:off x="640080" y="1280160"/>
+            <a:ext cx="10911535" cy="411480"/>
+          </a:xfrm>
+          <a:prstGeom prst="rect">
+            <a:avLst/>
+          </a:prstGeom>
+          <a:noFill/>
+        </p:spPr>
+        <p:txBody>
+          <a:bodyPr wrap="square" anchor="t" lIns="0" rIns="0" tIns="0" bIns="0">
+            <a:spAutoFit/>
+          </a:bodyPr>
+          <a:lstStyle/>
+          <a:p>
+            <a:pPr algn="ctr"/>
+            <a:r>
+              <a:rPr sz="1500" b="0" i="0">
+                <a:solidFill>
+                  <a:srgbClr val="2B2B2B"/>
+                </a:solidFill>
+                <a:latin typeface="Calibri"/>
+              </a:rPr>
+              <a:t>Sin fechas a propósito: aquí va </a:t>
+            </a:r>
+            <a:r>
+              <a:rPr sz="1500" b="1" i="0">
+                <a:solidFill>
+                  <a:srgbClr val="2B2B2B"/>
+                </a:solidFill>
+                <a:latin typeface="Calibri"/>
+              </a:rPr>
+              <a:t>en qué punto del curso</a:t>
+            </a:r>
+            <a:r>
+              <a:rPr sz="1500" b="0" i="0">
+                <a:solidFill>
+                  <a:srgbClr val="2B2B2B"/>
+                </a:solidFill>
+                <a:latin typeface="Calibri"/>
+              </a:rPr>
+              <a:t> cierra cada ítem · la ventana exacta la fija CDigital</a:t>
+            </a:r>
+          </a:p>
+        </p:txBody>
+      </p:sp>
+      <p:graphicFrame>
+        <p:nvGraphicFramePr>
+          <p:cNvPr id="5" name="Table 4"/>
+          <p:cNvGraphicFramePr>
+            <a:graphicFrameLocks noGrp="1"/>
+          </p:cNvGraphicFramePr>
+          <p:nvPr/>
+        </p:nvGraphicFramePr>
+        <p:xfrm>
+          <a:off x="640080" y="2011679"/>
+          <a:ext cx="10911533" cy="3017520"/>
+        </p:xfrm>
+        <a:graphic>
+          <a:graphicData uri="http://schemas.openxmlformats.org/drawingml/2006/table">
+            <a:tbl>
+              <a:tblPr>
+                <a:tableStyleId>{2D5ABB26-0587-4C30-8999-92F81FD0307C}</a:tableStyleId>
+              </a:tblPr>
+              <a:tblGrid>
+                <a:gridCol w="2659113"/>
+                <a:gridCol w="2659113"/>
+                <a:gridCol w="5593307"/>
+              </a:tblGrid>
+              <a:tr h="502920">
+                <a:tc>
+                  <a:txBody>
+                    <a:bodyPr/>
+                    <a:lstStyle/>
+                    <a:p>
+                      <a:pPr algn="l"/>
+                      <a:r>
+                        <a:rPr sz="1300" b="1" i="0">
+                          <a:solidFill>
+                            <a:srgbClr val="FFFFFF"/>
+                          </a:solidFill>
+                          <a:latin typeface="Calibri"/>
+                        </a:rPr>
+                        <a:t>Cierra en la semana de…</a:t>
+                      </a:r>
+                    </a:p>
+                  </a:txBody>
+                  <a:tcPr anchor="ctr" marL="109728" marR="91440" marT="36576" marB="36576">
+                    <a:solidFill>
+                      <a:srgbClr val="0C2340"/>
+                    </a:solidFill>
+                  </a:tcPr>
+                </a:tc>
+                <a:tc>
+                  <a:txBody>
+                    <a:bodyPr/>
+                    <a:lstStyle/>
+                    <a:p>
+                      <a:pPr algn="l"/>
+                      <a:r>
+                        <a:rPr sz="1300" b="1" i="0">
+                          <a:solidFill>
+                            <a:srgbClr val="FFFFFF"/>
+                          </a:solidFill>
+                          <a:latin typeface="Calibri"/>
+                        </a:rPr>
+                        <a:t>Entregable</a:t>
+                      </a:r>
+                    </a:p>
+                  </a:txBody>
+                  <a:tcPr anchor="ctr" marL="109728" marR="91440" marT="36576" marB="36576">
+                    <a:solidFill>
+                      <a:srgbClr val="0C2340"/>
+                    </a:solidFill>
+                  </a:tcPr>
+                </a:tc>
+                <a:tc>
+                  <a:txBody>
+                    <a:bodyPr/>
+                    <a:lstStyle/>
+                    <a:p>
+                      <a:pPr algn="l"/>
+                      <a:r>
+                        <a:rPr sz="1300" b="1" i="0">
+                          <a:solidFill>
+                            <a:srgbClr val="FFFFFF"/>
+                          </a:solidFill>
+                          <a:latin typeface="Calibri"/>
+                        </a:rPr>
+                        <a:t>Qué debes tener listo</a:t>
+                      </a:r>
+                    </a:p>
+                  </a:txBody>
+                  <a:tcPr anchor="ctr" marL="109728" marR="91440" marT="36576" marB="36576">
+                    <a:solidFill>
+                      <a:srgbClr val="0C2340"/>
+                    </a:solidFill>
+                  </a:tcPr>
+                </a:tc>
+              </a:tr>
+              <a:tr h="502920">
+                <a:tc>
+                  <a:txBody>
+                    <a:bodyPr/>
+                    <a:lstStyle/>
+                    <a:p>
+                      <a:pPr algn="l"/>
+                      <a:r>
+                        <a:rPr sz="1100" b="1" i="0">
+                          <a:solidFill>
+                            <a:srgbClr val="2B2B2B"/>
+                          </a:solidFill>
+                          <a:latin typeface="Calibri"/>
+                        </a:rPr>
+                        <a:t>Sesión 02</a:t>
+                      </a:r>
+                      <a:r>
+                        <a:rPr sz="1100" b="0" i="0">
+                          <a:solidFill>
+                            <a:srgbClr val="2B2B2B"/>
+                          </a:solidFill>
+                          <a:latin typeface="Calibri"/>
+                        </a:rPr>
+                        <a:t> · ya cerró</a:t>
+                      </a:r>
+                    </a:p>
+                  </a:txBody>
+                  <a:tcPr anchor="ctr" marL="109728" marR="91440" marT="36576" marB="36576">
+                    <a:solidFill>
+                      <a:srgbClr val="FFFFFF"/>
+                    </a:solidFill>
+                  </a:tcPr>
+                </a:tc>
+                <a:tc>
+                  <a:txBody>
+                    <a:bodyPr/>
+                    <a:lstStyle/>
+                    <a:p>
+                      <a:pPr algn="l"/>
+                      <a:r>
+                        <a:rPr sz="1100" b="1" i="0">
+                          <a:solidFill>
+                            <a:srgbClr val="2B2B2B"/>
+                          </a:solidFill>
+                          <a:latin typeface="Calibri"/>
+                        </a:rPr>
+                        <a:t>Quiz</a:t>
+                      </a:r>
+                      <a:r>
+                        <a:rPr sz="1100" b="0" i="0">
+                          <a:solidFill>
+                            <a:srgbClr val="2B2B2B"/>
+                          </a:solidFill>
+                          <a:latin typeface="Calibri"/>
+                        </a:rPr>
+                        <a:t> · Cuestionario · 25%</a:t>
+                      </a:r>
+                    </a:p>
+                  </a:txBody>
+                  <a:tcPr anchor="ctr" marL="109728" marR="91440" marT="36576" marB="36576">
+                    <a:solidFill>
+                      <a:srgbClr val="FFFFFF"/>
+                    </a:solidFill>
+                  </a:tcPr>
+                </a:tc>
+                <a:tc>
+                  <a:txBody>
+                    <a:bodyPr/>
+                    <a:lstStyle/>
+                    <a:p>
+                      <a:pPr algn="l"/>
+                      <a:r>
+                        <a:rPr sz="1100" b="0" i="0">
+                          <a:solidFill>
+                            <a:srgbClr val="2B2B2B"/>
+                          </a:solidFill>
+                          <a:latin typeface="Calibri"/>
+                        </a:rPr>
+                        <a:t>Estudia </a:t>
+                      </a:r>
+                      <a:r>
+                        <a:rPr sz="1100" b="1" i="0">
+                          <a:solidFill>
+                            <a:srgbClr val="2B2B2B"/>
+                          </a:solidFill>
+                          <a:latin typeface="Calibri"/>
+                        </a:rPr>
+                        <a:t>problema y pregunta</a:t>
+                      </a:r>
+                      <a:r>
+                        <a:rPr sz="1100" b="0" i="0">
+                          <a:solidFill>
+                            <a:srgbClr val="2B2B2B"/>
+                          </a:solidFill>
+                          <a:latin typeface="Calibri"/>
+                        </a:rPr>
+                        <a:t> de investigación; resuélvelo dentro de su ventana.</a:t>
+                      </a:r>
+                    </a:p>
+                  </a:txBody>
+                  <a:tcPr anchor="ctr" marL="109728" marR="91440" marT="36576" marB="36576">
+                    <a:solidFill>
+                      <a:srgbClr val="FFFFFF"/>
+                    </a:solidFill>
+                  </a:tcPr>
+                </a:tc>
+              </a:tr>
+              <a:tr h="502920">
+                <a:tc>
+                  <a:txBody>
+                    <a:bodyPr/>
+                    <a:lstStyle/>
+                    <a:p>
+                      <a:pPr algn="l"/>
+                      <a:r>
+                        <a:rPr sz="1100" b="1" i="0">
+                          <a:solidFill>
+                            <a:srgbClr val="2B2B2B"/>
+                          </a:solidFill>
+                          <a:latin typeface="Calibri"/>
+                        </a:rPr>
+                        <a:t>Sesión 07</a:t>
+                      </a:r>
+                      <a:r>
+                        <a:rPr sz="1100" b="0" i="0">
+                          <a:solidFill>
+                            <a:srgbClr val="2B2B2B"/>
+                          </a:solidFill>
+                          <a:latin typeface="Calibri"/>
+                        </a:rPr>
+                        <a:t> · ya cerró</a:t>
+                      </a:r>
+                    </a:p>
+                  </a:txBody>
+                  <a:tcPr anchor="ctr" marL="109728" marR="91440" marT="36576" marB="36576">
+                    <a:solidFill>
+                      <a:srgbClr val="F2F2F2"/>
+                    </a:solidFill>
+                  </a:tcPr>
+                </a:tc>
+                <a:tc>
+                  <a:txBody>
+                    <a:bodyPr/>
+                    <a:lstStyle/>
+                    <a:p>
+                      <a:pPr algn="l"/>
+                      <a:r>
+                        <a:rPr sz="1100" b="1" i="0">
+                          <a:solidFill>
+                            <a:srgbClr val="2B2B2B"/>
+                          </a:solidFill>
+                          <a:latin typeface="Calibri"/>
+                        </a:rPr>
+                        <a:t>ACA 1</a:t>
+                      </a:r>
+                      <a:r>
+                        <a:rPr sz="1100" b="0" i="0">
+                          <a:solidFill>
+                            <a:srgbClr val="2B2B2B"/>
+                          </a:solidFill>
+                          <a:latin typeface="Calibri"/>
+                        </a:rPr>
+                        <a:t> · Tarea · 25%</a:t>
+                      </a:r>
+                    </a:p>
+                  </a:txBody>
+                  <a:tcPr anchor="ctr" marL="109728" marR="91440" marT="36576" marB="36576">
+                    <a:solidFill>
+                      <a:srgbClr val="F2F2F2"/>
+                    </a:solidFill>
+                  </a:tcPr>
+                </a:tc>
+                <a:tc>
+                  <a:txBody>
+                    <a:bodyPr/>
+                    <a:lstStyle/>
+                    <a:p>
+                      <a:pPr algn="l"/>
+                      <a:r>
+                        <a:rPr sz="1100" b="0" i="0">
+                          <a:solidFill>
+                            <a:srgbClr val="2B2B2B"/>
+                          </a:solidFill>
+                          <a:latin typeface="Calibri"/>
+                        </a:rPr>
+                        <a:t>Sube en </a:t>
+                      </a:r>
+                      <a:r>
+                        <a:rPr sz="1100" b="1" i="0">
+                          <a:solidFill>
+                            <a:srgbClr val="2B2B2B"/>
+                          </a:solidFill>
+                          <a:latin typeface="Calibri"/>
+                        </a:rPr>
+                        <a:t>plantilla APA</a:t>
+                      </a:r>
+                      <a:r>
+                        <a:rPr sz="1100" b="0" i="0">
+                          <a:solidFill>
+                            <a:srgbClr val="2B2B2B"/>
+                          </a:solidFill>
+                          <a:latin typeface="Calibri"/>
+                        </a:rPr>
+                        <a:t> problema, pregunta, objetivos, mínimo 6 antecedentes y los marcos.</a:t>
+                      </a:r>
+                    </a:p>
+                  </a:txBody>
+                  <a:tcPr anchor="ctr" marL="109728" marR="91440" marT="36576" marB="36576">
+                    <a:solidFill>
+                      <a:srgbClr val="F2F2F2"/>
+                    </a:solidFill>
+                  </a:tcPr>
+                </a:tc>
+              </a:tr>
+              <a:tr h="502920">
+                <a:tc>
+                  <a:txBody>
+                    <a:bodyPr/>
+                    <a:lstStyle/>
+                    <a:p>
+                      <a:pPr algn="l"/>
+                      <a:r>
+                        <a:rPr sz="1100" b="1" i="0">
+                          <a:solidFill>
+                            <a:srgbClr val="2B2B2B"/>
+                          </a:solidFill>
+                          <a:latin typeface="Calibri"/>
+                        </a:rPr>
+                        <a:t>Sesión 10</a:t>
+                      </a:r>
+                      <a:r>
+                        <a:rPr sz="1100" b="0" i="0">
+                          <a:solidFill>
+                            <a:srgbClr val="2B2B2B"/>
+                          </a:solidFill>
+                          <a:latin typeface="Calibri"/>
+                        </a:rPr>
+                        <a:t> · ya cerró</a:t>
+                      </a:r>
+                    </a:p>
+                  </a:txBody>
+                  <a:tcPr anchor="ctr" marL="109728" marR="91440" marT="36576" marB="36576">
+                    <a:solidFill>
+                      <a:srgbClr val="FFFFFF"/>
+                    </a:solidFill>
+                  </a:tcPr>
+                </a:tc>
+                <a:tc>
+                  <a:txBody>
+                    <a:bodyPr/>
+                    <a:lstStyle/>
+                    <a:p>
+                      <a:pPr algn="l"/>
+                      <a:r>
+                        <a:rPr sz="1100" b="1" i="0">
+                          <a:solidFill>
+                            <a:srgbClr val="2B2B2B"/>
+                          </a:solidFill>
+                          <a:latin typeface="Calibri"/>
+                        </a:rPr>
+                        <a:t>ACA FINAL</a:t>
+                      </a:r>
+                      <a:r>
+                        <a:rPr sz="1100" b="0" i="0">
+                          <a:solidFill>
+                            <a:srgbClr val="2B2B2B"/>
+                          </a:solidFill>
+                          <a:latin typeface="Calibri"/>
+                        </a:rPr>
+                        <a:t> · Tarea · 42%</a:t>
+                      </a:r>
+                    </a:p>
+                  </a:txBody>
+                  <a:tcPr anchor="ctr" marL="109728" marR="91440" marT="36576" marB="36576">
+                    <a:solidFill>
+                      <a:srgbClr val="FFFFFF"/>
+                    </a:solidFill>
+                  </a:tcPr>
+                </a:tc>
+                <a:tc>
+                  <a:txBody>
+                    <a:bodyPr/>
+                    <a:lstStyle/>
+                    <a:p>
+                      <a:pPr algn="l"/>
+                      <a:r>
+                        <a:rPr sz="1100" b="0" i="0">
+                          <a:solidFill>
+                            <a:srgbClr val="2B2B2B"/>
+                          </a:solidFill>
+                          <a:latin typeface="Calibri"/>
+                        </a:rPr>
+                        <a:t>Sube el anteproyecto integrado con las </a:t>
+                      </a:r>
+                      <a:r>
+                        <a:rPr sz="1100" b="1" i="0">
+                          <a:solidFill>
+                            <a:srgbClr val="2B2B2B"/>
+                          </a:solidFill>
+                          <a:latin typeface="Calibri"/>
+                        </a:rPr>
+                        <a:t>correcciones</a:t>
+                      </a:r>
+                      <a:r>
+                        <a:rPr sz="1100" b="0" i="0">
+                          <a:solidFill>
+                            <a:srgbClr val="2B2B2B"/>
+                          </a:solidFill>
+                          <a:latin typeface="Calibri"/>
+                        </a:rPr>
+                        <a:t> de la ACA 1, metodología y viabilidad.</a:t>
+                      </a:r>
+                    </a:p>
+                  </a:txBody>
+                  <a:tcPr anchor="ctr" marL="109728" marR="91440" marT="36576" marB="36576">
+                    <a:solidFill>
+                      <a:srgbClr val="FFFFFF"/>
+                    </a:solidFill>
+                  </a:tcPr>
+                </a:tc>
+              </a:tr>
+              <a:tr h="502920">
+                <a:tc>
+                  <a:txBody>
+                    <a:bodyPr/>
+                    <a:lstStyle/>
+                    <a:p>
+                      <a:pPr algn="l"/>
+                      <a:r>
+                        <a:rPr sz="1100" b="1" i="0">
+                          <a:solidFill>
+                            <a:srgbClr val="2B2B2B"/>
+                          </a:solidFill>
+                          <a:latin typeface="Calibri"/>
+                        </a:rPr>
+                        <a:t>Sesión 11</a:t>
+                      </a:r>
+                      <a:r>
+                        <a:rPr sz="1100" b="0" i="0">
+                          <a:solidFill>
+                            <a:srgbClr val="2B2B2B"/>
+                          </a:solidFill>
+                          <a:latin typeface="Calibri"/>
+                        </a:rPr>
+                        <a:t> · cierra esta semana</a:t>
+                      </a:r>
+                    </a:p>
+                  </a:txBody>
+                  <a:tcPr anchor="ctr" marL="109728" marR="91440" marT="36576" marB="36576">
+                    <a:solidFill>
+                      <a:srgbClr val="F2F2F2"/>
+                    </a:solidFill>
+                  </a:tcPr>
+                </a:tc>
+                <a:tc>
+                  <a:txBody>
+                    <a:bodyPr/>
+                    <a:lstStyle/>
+                    <a:p>
+                      <a:pPr algn="l"/>
+                      <a:r>
+                        <a:rPr sz="1100" b="1" i="0">
+                          <a:solidFill>
+                            <a:srgbClr val="2B2B2B"/>
+                          </a:solidFill>
+                          <a:latin typeface="Calibri"/>
+                        </a:rPr>
+                        <a:t>Autoevaluación</a:t>
+                      </a:r>
+                      <a:r>
+                        <a:rPr sz="1100" b="0" i="0">
+                          <a:solidFill>
+                            <a:srgbClr val="2B2B2B"/>
+                          </a:solidFill>
+                          <a:latin typeface="Calibri"/>
+                        </a:rPr>
+                        <a:t> · Cuestionario · 4%</a:t>
+                      </a:r>
+                    </a:p>
+                  </a:txBody>
+                  <a:tcPr anchor="ctr" marL="109728" marR="91440" marT="36576" marB="36576">
+                    <a:solidFill>
+                      <a:srgbClr val="F2F2F2"/>
+                    </a:solidFill>
+                  </a:tcPr>
+                </a:tc>
+                <a:tc>
+                  <a:txBody>
+                    <a:bodyPr/>
+                    <a:lstStyle/>
+                    <a:p>
+                      <a:pPr algn="l"/>
+                      <a:r>
+                        <a:rPr sz="1100" b="0" i="0">
+                          <a:solidFill>
+                            <a:srgbClr val="2B2B2B"/>
+                          </a:solidFill>
+                          <a:latin typeface="Calibri"/>
+                        </a:rPr>
+                        <a:t>Diligénciala tú, dentro de su ventana, según tu </a:t>
+                      </a:r>
+                      <a:r>
+                        <a:rPr sz="1100" b="1" i="0">
+                          <a:solidFill>
+                            <a:srgbClr val="2B2B2B"/>
+                          </a:solidFill>
+                          <a:latin typeface="Calibri"/>
+                        </a:rPr>
+                        <a:t>participación real</a:t>
+                      </a:r>
+                      <a:r>
+                        <a:rPr sz="1100" b="0" i="0">
+                          <a:solidFill>
+                            <a:srgbClr val="2B2B2B"/>
+                          </a:solidFill>
+                          <a:latin typeface="Calibri"/>
+                        </a:rPr>
+                        <a:t>.</a:t>
+                      </a:r>
+                    </a:p>
+                  </a:txBody>
+                  <a:tcPr anchor="ctr" marL="109728" marR="91440" marT="36576" marB="36576">
+                    <a:solidFill>
+                      <a:srgbClr val="F2F2F2"/>
+                    </a:solidFill>
+                  </a:tcPr>
+                </a:tc>
+              </a:tr>
+              <a:tr h="502920">
+                <a:tc>
+                  <a:txBody>
+                    <a:bodyPr/>
+                    <a:lstStyle/>
+                    <a:p>
+                      <a:pPr algn="l"/>
+                      <a:r>
+                        <a:rPr sz="1100" b="1" i="0">
+                          <a:solidFill>
+                            <a:srgbClr val="2B2B2B"/>
+                          </a:solidFill>
+                          <a:latin typeface="Calibri"/>
+                        </a:rPr>
+                        <a:t>Sesión 11</a:t>
+                      </a:r>
+                      <a:r>
+                        <a:rPr sz="1100" b="0" i="0">
+                          <a:solidFill>
+                            <a:srgbClr val="2B2B2B"/>
+                          </a:solidFill>
+                          <a:latin typeface="Calibri"/>
+                        </a:rPr>
+                        <a:t> · cierra esta semana</a:t>
+                      </a:r>
+                    </a:p>
+                  </a:txBody>
+                  <a:tcPr anchor="ctr" marL="109728" marR="91440" marT="36576" marB="36576">
+                    <a:solidFill>
+                      <a:srgbClr val="FFFFFF"/>
+                    </a:solidFill>
+                  </a:tcPr>
+                </a:tc>
+                <a:tc>
+                  <a:txBody>
+                    <a:bodyPr/>
+                    <a:lstStyle/>
+                    <a:p>
+                      <a:pPr algn="l"/>
+                      <a:r>
+                        <a:rPr sz="1100" b="1" i="0">
+                          <a:solidFill>
+                            <a:srgbClr val="2B2B2B"/>
+                          </a:solidFill>
+                          <a:latin typeface="Calibri"/>
+                        </a:rPr>
+                        <a:t>Coevaluación</a:t>
+                      </a:r>
+                      <a:r>
+                        <a:rPr sz="1100" b="0" i="0">
+                          <a:solidFill>
+                            <a:srgbClr val="2B2B2B"/>
+                          </a:solidFill>
+                          <a:latin typeface="Calibri"/>
+                        </a:rPr>
+                        <a:t> · Foro · 4%</a:t>
+                      </a:r>
+                    </a:p>
+                  </a:txBody>
+                  <a:tcPr anchor="ctr" marL="109728" marR="91440" marT="36576" marB="36576">
+                    <a:solidFill>
+                      <a:srgbClr val="FFFFFF"/>
+                    </a:solidFill>
+                  </a:tcPr>
+                </a:tc>
+                <a:tc>
+                  <a:txBody>
+                    <a:bodyPr/>
+                    <a:lstStyle/>
+                    <a:p>
+                      <a:pPr algn="l"/>
+                      <a:r>
+                        <a:rPr sz="1100" b="1" i="0">
+                          <a:solidFill>
+                            <a:srgbClr val="2B2B2B"/>
+                          </a:solidFill>
+                          <a:latin typeface="Calibri"/>
+                        </a:rPr>
+                        <a:t>Publica</a:t>
+                      </a:r>
+                      <a:r>
+                        <a:rPr sz="1100" b="0" i="0">
+                          <a:solidFill>
+                            <a:srgbClr val="2B2B2B"/>
+                          </a:solidFill>
+                          <a:latin typeface="Calibri"/>
+                        </a:rPr>
+                        <a:t> tu propio aporte y valora hechos del trabajo del equipo, con respeto.</a:t>
+                      </a:r>
+                    </a:p>
+                  </a:txBody>
+                  <a:tcPr anchor="ctr" marL="109728" marR="91440" marT="36576" marB="36576">
+                    <a:solidFill>
+                      <a:srgbClr val="FFFFFF"/>
+                    </a:solidFill>
+                  </a:tcPr>
+                </a:tc>
+              </a:tr>
+            </a:tbl>
+          </a:graphicData>
+        </a:graphic>
+      </p:graphicFrame>
+      <p:sp>
+        <p:nvSpPr>
+          <p:cNvPr id="6" name="TextBox 5"/>
+          <p:cNvSpPr txBox="1"/>
+          <p:nvPr/>
+        </p:nvSpPr>
+        <p:spPr>
+          <a:xfrm>
+            <a:off x="640080" y="5166360"/>
+            <a:ext cx="10911535" cy="548640"/>
+          </a:xfrm>
+          <a:prstGeom prst="rect">
+            <a:avLst/>
+          </a:prstGeom>
+          <a:noFill/>
+        </p:spPr>
+        <p:txBody>
+          <a:bodyPr wrap="square" anchor="t" lIns="0" rIns="0" tIns="0" bIns="0">
+            <a:spAutoFit/>
+          </a:bodyPr>
+          <a:lstStyle/>
+          <a:p>
+            <a:r>
+              <a:rPr sz="1200" b="0" i="1">
+                <a:solidFill>
+                  <a:srgbClr val="2B2B2B"/>
+                </a:solidFill>
+                <a:latin typeface="Calibri"/>
+              </a:rPr>
+              <a:t>Esta misma tabla va al final de todas las sesiones. La </a:t>
+            </a:r>
+            <a:r>
+              <a:rPr sz="1200" b="1" i="1">
+                <a:solidFill>
+                  <a:srgbClr val="2B2B2B"/>
+                </a:solidFill>
+                <a:latin typeface="Calibri"/>
+              </a:rPr>
+              <a:t>fecha</a:t>
+            </a:r>
+            <a:r>
+              <a:rPr sz="1200" b="0" i="1">
+                <a:solidFill>
+                  <a:srgbClr val="2B2B2B"/>
+                </a:solidFill>
+                <a:latin typeface="Calibri"/>
+              </a:rPr>
+              <a:t> de cada ventana está en el enunciado del ítem (`Clases/Recursos/ACAs/`) y en el aula: si el aula y cualquier otro material se contradicen, </a:t>
+            </a:r>
+            <a:r>
+              <a:rPr sz="1200" b="1" i="1">
+                <a:solidFill>
+                  <a:srgbClr val="2B2B2B"/>
+                </a:solidFill>
+                <a:latin typeface="Calibri"/>
+              </a:rPr>
+              <a:t>manda el aula</a:t>
+            </a:r>
+            <a:r>
+              <a:rPr sz="1200" b="0" i="1">
+                <a:solidFill>
+                  <a:srgbClr val="2B2B2B"/>
+                </a:solidFill>
+                <a:latin typeface="Calibri"/>
+              </a:rPr>
+              <a:t>.</a:t>
+            </a:r>
+          </a:p>
+        </p:txBody>
+      </p:sp>
+      <p:sp>
+        <p:nvSpPr>
+          <p:cNvPr id="7" name="TextBox 6"/>
+          <p:cNvSpPr txBox="1"/>
+          <p:nvPr/>
+        </p:nvSpPr>
+        <p:spPr>
+          <a:xfrm>
+            <a:off x="11094415" y="6446520"/>
+            <a:ext cx="548640" cy="274320"/>
+          </a:xfrm>
+          <a:prstGeom prst="rect">
+            <a:avLst/>
+          </a:prstGeom>
+          <a:noFill/>
+        </p:spPr>
+        <p:txBody>
+          <a:bodyPr wrap="square" anchor="t" lIns="0" rIns="0" tIns="0" bIns="0">
+            <a:spAutoFit/>
+          </a:bodyPr>
+          <a:lstStyle/>
+          <a:p>
+            <a:pPr algn="r"/>
+            <a:r>
+              <a:rPr sz="1000" b="1" i="0">
+                <a:solidFill>
+                  <a:srgbClr val="8F989D"/>
+                </a:solidFill>
+                <a:latin typeface="Calibri"/>
+              </a:rPr>
+              <a:t>20</a:t>
+            </a:r>
+          </a:p>
+        </p:txBody>
+      </p:sp>
+    </p:spTree>
+  </p:cSld>
+  <p:clrMapOvr>
+    <a:masterClrMapping/>
+  </p:clrMapOvr>
+</p:sld>
+</file>
+
+<file path=ppt/slides/slide21.xml><?xml version="1.0" encoding="utf-8"?>
 <p:sld xmlns:a="http://schemas.openxmlformats.org/drawingml/2006/main" xmlns:p="http://schemas.openxmlformats.org/presentationml/2006/main" xmlns:r="http://schemas.openxmlformats.org/officeDocument/2006/relationships">
   <p:cSld>
     <p:bg>
@@ -7455,457 +9290,6 @@
                 <a:latin typeface="Calibri"/>
               </a:rPr>
               <a:t>PROYECTO I</a:t>
-            </a:r>
-          </a:p>
-        </p:txBody>
-      </p:sp>
-    </p:spTree>
-  </p:cSld>
-  <p:clrMapOvr>
-    <a:masterClrMapping/>
-  </p:clrMapOvr>
-</p:sld>
-</file>
-
-<file path=ppt/slides/slide2.xml><?xml version="1.0" encoding="utf-8"?>
-<p:sld xmlns:a="http://schemas.openxmlformats.org/drawingml/2006/main" xmlns:p="http://schemas.openxmlformats.org/presentationml/2006/main" xmlns:r="http://schemas.openxmlformats.org/officeDocument/2006/relationships">
-  <p:cSld>
-    <p:bg>
-      <p:bgPr>
-        <a:solidFill>
-          <a:srgbClr val="FFFFFF"/>
-        </a:solidFill>
-        <a:effectLst/>
-      </p:bgPr>
-    </p:bg>
-    <p:spTree>
-      <p:nvGrpSpPr>
-        <p:cNvPr id="1" name=""/>
-        <p:cNvGrpSpPr/>
-        <p:nvPr/>
-      </p:nvGrpSpPr>
-      <p:grpSpPr/>
-      <p:sp>
-        <p:nvSpPr>
-          <p:cNvPr id="2" name="Rectangle 1"/>
-          <p:cNvSpPr/>
-          <p:nvPr/>
-        </p:nvSpPr>
-        <p:spPr>
-          <a:xfrm>
-            <a:off x="0" y="0"/>
-            <a:ext cx="12191695" cy="1188720"/>
-          </a:xfrm>
-          <a:prstGeom prst="rect">
-            <a:avLst/>
-          </a:prstGeom>
-          <a:solidFill>
-            <a:srgbClr val="0C2340"/>
-          </a:solidFill>
-          <a:ln>
-            <a:noFill/>
-          </a:ln>
-          <a:effectLst/>
-        </p:spPr>
-        <p:style>
-          <a:lnRef idx="1">
-            <a:schemeClr val="accent1"/>
-          </a:lnRef>
-          <a:fillRef idx="3">
-            <a:schemeClr val="accent1"/>
-          </a:fillRef>
-          <a:effectRef idx="2">
-            <a:schemeClr val="accent1"/>
-          </a:effectRef>
-          <a:fontRef idx="minor">
-            <a:schemeClr val="lt1"/>
-          </a:fontRef>
-        </p:style>
-        <p:txBody>
-          <a:bodyPr rtlCol="0" anchor="ctr"/>
-          <a:lstStyle/>
-          <a:p>
-            <a:pPr algn="ctr"/>
-          </a:p>
-        </p:txBody>
-      </p:sp>
-      <p:sp>
-        <p:nvSpPr>
-          <p:cNvPr id="3" name="TextBox 2"/>
-          <p:cNvSpPr txBox="1"/>
-          <p:nvPr/>
-        </p:nvSpPr>
-        <p:spPr>
-          <a:xfrm>
-            <a:off x="640080" y="0"/>
-            <a:ext cx="9082735" cy="1188720"/>
-          </a:xfrm>
-          <a:prstGeom prst="rect">
-            <a:avLst/>
-          </a:prstGeom>
-          <a:noFill/>
-        </p:spPr>
-        <p:txBody>
-          <a:bodyPr wrap="square" anchor="ctr" lIns="0" rIns="0" tIns="0" bIns="0">
-            <a:spAutoFit/>
-          </a:bodyPr>
-          <a:lstStyle/>
-          <a:p>
-            <a:pPr algn="ctr"/>
-            <a:r>
-              <a:rPr sz="2600" b="1" i="0">
-                <a:solidFill>
-                  <a:srgbClr val="FFFFFF"/>
-                </a:solidFill>
-                <a:latin typeface="Calibri"/>
-              </a:rPr>
-              <a:t>Su anteproyecto se va a leer de corrido: ¿historia o collage?</a:t>
-            </a:r>
-          </a:p>
-        </p:txBody>
-      </p:sp>
-      <p:sp>
-        <p:nvSpPr>
-          <p:cNvPr id="4" name="TextBox 3"/>
-          <p:cNvSpPr txBox="1"/>
-          <p:nvPr/>
-        </p:nvSpPr>
-        <p:spPr>
-          <a:xfrm>
-            <a:off x="640080" y="1691639"/>
-            <a:ext cx="10911535" cy="4617720"/>
-          </a:xfrm>
-          <a:prstGeom prst="rect">
-            <a:avLst/>
-          </a:prstGeom>
-          <a:noFill/>
-        </p:spPr>
-        <p:txBody>
-          <a:bodyPr wrap="square" anchor="t" lIns="0" rIns="0" tIns="0" bIns="0">
-            <a:spAutoFit/>
-          </a:bodyPr>
-          <a:lstStyle/>
-          <a:p>
-            <a:pPr>
-              <a:spcAft>
-                <a:spcPts val="1000"/>
-              </a:spcAft>
-            </a:pPr>
-            <a:r>
-              <a:rPr sz="1600" b="0" i="0">
-                <a:solidFill>
-                  <a:srgbClr val="2B2B2B"/>
-                </a:solidFill>
-                <a:latin typeface="Calibri"/>
-              </a:rPr>
-              <a:t>–   Quien evalúa su anteproyecto </a:t>
-            </a:r>
-            <a:r>
-              <a:rPr sz="1600" b="1" i="0">
-                <a:solidFill>
-                  <a:srgbClr val="2B2B2B"/>
-                </a:solidFill>
-                <a:latin typeface="Calibri"/>
-              </a:rPr>
-              <a:t>no lo lee por capítulos sueltos</a:t>
-            </a:r>
-            <a:r>
-              <a:rPr sz="1600" b="0" i="0">
-                <a:solidFill>
-                  <a:srgbClr val="2B2B2B"/>
-                </a:solidFill>
-                <a:latin typeface="Calibri"/>
-              </a:rPr>
-              <a:t>: lo lee de principio a fin, seguido.</a:t>
-            </a:r>
-          </a:p>
-          <a:p>
-            <a:pPr lvl="1">
-              <a:spcAft>
-                <a:spcPts val="600"/>
-              </a:spcAft>
-            </a:pPr>
-            <a:r>
-              <a:rPr sz="1500" b="0" i="0">
-                <a:solidFill>
-                  <a:srgbClr val="2B2B2B"/>
-                </a:solidFill>
-                <a:latin typeface="Calibri"/>
-              </a:rPr>
-              <a:t>●   Y en esa lectura corrida se nota, en dos minutos, si el documento es </a:t>
-            </a:r>
-            <a:r>
-              <a:rPr sz="1500" b="1" i="0">
-                <a:solidFill>
-                  <a:srgbClr val="2B2B2B"/>
-                </a:solidFill>
-                <a:latin typeface="Calibri"/>
-              </a:rPr>
-              <a:t>una historia</a:t>
-            </a:r>
-            <a:r>
-              <a:rPr sz="1500" b="0" i="0">
-                <a:solidFill>
-                  <a:srgbClr val="2B2B2B"/>
-                </a:solidFill>
-                <a:latin typeface="Calibri"/>
-              </a:rPr>
-              <a:t> o </a:t>
-            </a:r>
-            <a:r>
-              <a:rPr sz="1500" b="1" i="0">
-                <a:solidFill>
-                  <a:srgbClr val="2B2B2B"/>
-                </a:solidFill>
-                <a:latin typeface="Calibri"/>
-              </a:rPr>
-              <a:t>un collage de tareas</a:t>
-            </a:r>
-            <a:r>
-              <a:rPr sz="1500" b="0" i="0">
-                <a:solidFill>
-                  <a:srgbClr val="2B2B2B"/>
-                </a:solidFill>
-                <a:latin typeface="Calibri"/>
-              </a:rPr>
-              <a:t>.</a:t>
-            </a:r>
-          </a:p>
-          <a:p>
-            <a:pPr>
-              <a:spcAft>
-                <a:spcPts val="1000"/>
-              </a:spcAft>
-            </a:pPr>
-            <a:r>
-              <a:rPr sz="1600" b="0" i="0">
-                <a:solidFill>
-                  <a:srgbClr val="2B2B2B"/>
-                </a:solidFill>
-                <a:latin typeface="Calibri"/>
-              </a:rPr>
-              <a:t>–   Collage: el capítulo 1 promete una cosa, el método hace otra y el cronograma no menciona ninguna de las dos.</a:t>
-            </a:r>
-          </a:p>
-          <a:p>
-            <a:pPr>
-              <a:spcAft>
-                <a:spcPts val="1000"/>
-              </a:spcAft>
-            </a:pPr>
-            <a:r>
-              <a:rPr sz="1600" b="0" i="0">
-                <a:solidFill>
-                  <a:srgbClr val="2B2B2B"/>
-                </a:solidFill>
-                <a:latin typeface="Calibri"/>
-              </a:rPr>
-              <a:t>–   Historia: cada sección </a:t>
-            </a:r>
-            <a:r>
-              <a:rPr sz="1600" b="1" i="0">
-                <a:solidFill>
-                  <a:srgbClr val="2B2B2B"/>
-                </a:solidFill>
-                <a:latin typeface="Calibri"/>
-              </a:rPr>
-              <a:t>recoge</a:t>
-            </a:r>
-            <a:r>
-              <a:rPr sz="1600" b="0" i="0">
-                <a:solidFill>
-                  <a:srgbClr val="2B2B2B"/>
-                </a:solidFill>
-                <a:latin typeface="Calibri"/>
-              </a:rPr>
-              <a:t> lo que dijo la anterior y </a:t>
-            </a:r>
-            <a:r>
-              <a:rPr sz="1600" b="1" i="0">
-                <a:solidFill>
-                  <a:srgbClr val="2B2B2B"/>
-                </a:solidFill>
-                <a:latin typeface="Calibri"/>
-              </a:rPr>
-              <a:t>prepara</a:t>
-            </a:r>
-            <a:r>
-              <a:rPr sz="1600" b="0" i="0">
-                <a:solidFill>
-                  <a:srgbClr val="2B2B2B"/>
-                </a:solidFill>
-                <a:latin typeface="Calibri"/>
-              </a:rPr>
-              <a:t> la siguiente. No hay saltos ni sorpresas.</a:t>
-            </a:r>
-          </a:p>
-          <a:p>
-            <a:pPr>
-              <a:spcAft>
-                <a:spcPts val="1000"/>
-              </a:spcAft>
-            </a:pPr>
-            <a:r>
-              <a:rPr sz="1600" b="0" i="0">
-                <a:solidFill>
-                  <a:srgbClr val="2B2B2B"/>
-                </a:solidFill>
-                <a:latin typeface="Calibri"/>
-              </a:rPr>
-              <a:t>–   Hoy, en la última sesión de contenido, hacemos tres cosas concretas:</a:t>
-            </a:r>
-          </a:p>
-          <a:p>
-            <a:pPr lvl="1">
-              <a:spcAft>
-                <a:spcPts val="600"/>
-              </a:spcAft>
-            </a:pPr>
-            <a:r>
-              <a:rPr sz="1500" b="0" i="0">
-                <a:solidFill>
-                  <a:srgbClr val="2B2B2B"/>
-                </a:solidFill>
-                <a:latin typeface="Calibri"/>
-              </a:rPr>
-              <a:t>●   </a:t>
-            </a:r>
-            <a:r>
-              <a:rPr sz="1500" b="1" i="0">
-                <a:solidFill>
-                  <a:srgbClr val="2B2B2B"/>
-                </a:solidFill>
-                <a:latin typeface="Calibri"/>
-              </a:rPr>
-              <a:t>Verificar</a:t>
-            </a:r>
-            <a:r>
-              <a:rPr sz="1500" b="0" i="0">
-                <a:solidFill>
-                  <a:srgbClr val="2B2B2B"/>
-                </a:solidFill>
-                <a:latin typeface="Calibri"/>
-              </a:rPr>
-              <a:t> la integración final con un checklist en mano, sección por sección.</a:t>
-            </a:r>
-          </a:p>
-          <a:p>
-            <a:pPr lvl="1">
-              <a:spcAft>
-                <a:spcPts val="600"/>
-              </a:spcAft>
-            </a:pPr>
-            <a:r>
-              <a:rPr sz="1500" b="0" i="0">
-                <a:solidFill>
-                  <a:srgbClr val="2B2B2B"/>
-                </a:solidFill>
-                <a:latin typeface="Calibri"/>
-              </a:rPr>
-              <a:t>●   </a:t>
-            </a:r>
-            <a:r>
-              <a:rPr sz="1500" b="1" i="0">
-                <a:solidFill>
-                  <a:srgbClr val="2B2B2B"/>
-                </a:solidFill>
-                <a:latin typeface="Calibri"/>
-              </a:rPr>
-              <a:t>Entrenar el ojo crítico</a:t>
-            </a:r>
-            <a:r>
-              <a:rPr sz="1500" b="0" i="0">
-                <a:solidFill>
-                  <a:srgbClr val="2B2B2B"/>
-                </a:solidFill>
-                <a:latin typeface="Calibri"/>
-              </a:rPr>
-              <a:t> con una rúbrica de cuatro criterios, leyendo el trabajo de otro equipo.</a:t>
-            </a:r>
-          </a:p>
-          <a:p>
-            <a:pPr lvl="1">
-              <a:spcAft>
-                <a:spcPts val="600"/>
-              </a:spcAft>
-            </a:pPr>
-            <a:r>
-              <a:rPr sz="1500" b="0" i="0">
-                <a:solidFill>
-                  <a:srgbClr val="2B2B2B"/>
-                </a:solidFill>
-                <a:latin typeface="Calibri"/>
-              </a:rPr>
-              <a:t>●   </a:t>
-            </a:r>
-            <a:r>
-              <a:rPr sz="1500" b="1" i="0">
-                <a:solidFill>
-                  <a:srgbClr val="2B2B2B"/>
-                </a:solidFill>
-                <a:latin typeface="Calibri"/>
-              </a:rPr>
-              <a:t>Aplicar</a:t>
-            </a:r>
-            <a:r>
-              <a:rPr sz="1500" b="0" i="0">
-                <a:solidFill>
-                  <a:srgbClr val="2B2B2B"/>
-                </a:solidFill>
-                <a:latin typeface="Calibri"/>
-              </a:rPr>
-              <a:t> los ajustes que valgan la pena en su propio documento, hoy mismo.</a:t>
-            </a:r>
-          </a:p>
-          <a:p>
-            <a:pPr>
-              <a:spcAft>
-                <a:spcPts val="1000"/>
-              </a:spcAft>
-            </a:pPr>
-            <a:r>
-              <a:rPr sz="1600" b="0" i="0">
-                <a:solidFill>
-                  <a:srgbClr val="2B2B2B"/>
-                </a:solidFill>
-                <a:latin typeface="Calibri"/>
-              </a:rPr>
-              <a:t>–   Lo que se corrige hoy no se corrige nunca más: después de este encuentro, el trabajo es autónomo.</a:t>
-            </a:r>
-          </a:p>
-        </p:txBody>
-      </p:sp>
-      <p:sp>
-        <p:nvSpPr>
-          <p:cNvPr id="5" name="TextBox 4"/>
-          <p:cNvSpPr txBox="1"/>
-          <p:nvPr/>
-        </p:nvSpPr>
-        <p:spPr>
-          <a:xfrm>
-            <a:off x="11094415" y="6446520"/>
-            <a:ext cx="548640" cy="274320"/>
-          </a:xfrm>
-          <a:prstGeom prst="rect">
-            <a:avLst/>
-          </a:prstGeom>
-          <a:noFill/>
-        </p:spPr>
-        <p:txBody>
-          <a:bodyPr wrap="square" anchor="t" lIns="0" rIns="0" tIns="0" bIns="0">
-            <a:spAutoFit/>
-          </a:bodyPr>
-          <a:lstStyle/>
-          <a:p>
-            <a:pPr algn="r"/>
-            <a:r>
-              <a:rPr sz="1000" b="1" i="0">
-                <a:solidFill>
-                  <a:srgbClr val="8F989D"/>
-                </a:solidFill>
-                <a:latin typeface="Calibri"/>
-              </a:rPr>
-              <a:t>2</a:t>
             </a:r>
           </a:p>
         </p:txBody>
